--- a/Проект по БД.pptx
+++ b/Проект по БД.pptx
@@ -114,6 +114,22 @@
       </a:defRPr>
     </a:lvl9pPr>
   </p:defaultTextStyle>
+  <p:extLst>
+    <p:ext uri="{EFAFB233-063F-42B5-8137-9DF3F51BA10A}">
+      <p15:sldGuideLst xmlns:p15="http://schemas.microsoft.com/office/powerpoint/2012/main">
+        <p15:guide id="1" orient="horz" pos="1620">
+          <p15:clr>
+            <a:srgbClr val="A4A3A4"/>
+          </p15:clr>
+        </p15:guide>
+        <p15:guide id="2" pos="2880">
+          <p15:clr>
+            <a:srgbClr val="A4A3A4"/>
+          </p15:clr>
+        </p15:guide>
+      </p15:sldGuideLst>
+    </p:ext>
+  </p:extLst>
 </p:presentation>
 </file>
 
@@ -159,7 +175,7 @@
           </a:lstStyle>
           <a:p>
             <a:r>
-              <a:rPr kumimoji="0" lang="ru-RU" smtClean="0"/>
+              <a:rPr kumimoji="0" lang="ru-RU"/>
               <a:t>Образец заголовка</a:t>
             </a:r>
             <a:endParaRPr kumimoji="0" lang="en-US"/>
@@ -220,7 +236,7 @@
           </a:lstStyle>
           <a:p>
             <a:r>
-              <a:rPr kumimoji="0" lang="ru-RU" smtClean="0"/>
+              <a:rPr kumimoji="0" lang="ru-RU"/>
               <a:t>Образец подзаголовка</a:t>
             </a:r>
             <a:endParaRPr kumimoji="0" lang="en-US"/>
@@ -249,7 +265,7 @@
           <a:p>
             <a:fld id="{B4C71EC6-210F-42DE-9C53-41977AD35B3D}" type="datetimeFigureOut">
               <a:rPr lang="ru-RU" smtClean="0"/>
-              <a:t>24.06.2026</a:t>
+              <a:t>25.06.2026</a:t>
             </a:fld>
             <a:endParaRPr lang="ru-RU"/>
           </a:p>
@@ -1042,7 +1058,7 @@
           <a:lstStyle/>
           <a:p>
             <a:r>
-              <a:rPr kumimoji="0" lang="ru-RU" smtClean="0"/>
+              <a:rPr kumimoji="0" lang="ru-RU"/>
               <a:t>Образец заголовка</a:t>
             </a:r>
             <a:endParaRPr kumimoji="0" lang="en-US"/>
@@ -1066,35 +1082,35 @@
           <a:p>
             <a:pPr lvl="0" eaLnBrk="1" latinLnBrk="0" hangingPunct="1"/>
             <a:r>
-              <a:rPr lang="ru-RU" smtClean="0"/>
+              <a:rPr lang="ru-RU"/>
               <a:t>Образец текста</a:t>
             </a:r>
           </a:p>
           <a:p>
             <a:pPr lvl="1" eaLnBrk="1" latinLnBrk="0" hangingPunct="1"/>
             <a:r>
-              <a:rPr lang="ru-RU" smtClean="0"/>
+              <a:rPr lang="ru-RU"/>
               <a:t>Второй уровень</a:t>
             </a:r>
           </a:p>
           <a:p>
             <a:pPr lvl="2" eaLnBrk="1" latinLnBrk="0" hangingPunct="1"/>
             <a:r>
-              <a:rPr lang="ru-RU" smtClean="0"/>
+              <a:rPr lang="ru-RU"/>
               <a:t>Третий уровень</a:t>
             </a:r>
           </a:p>
           <a:p>
             <a:pPr lvl="3" eaLnBrk="1" latinLnBrk="0" hangingPunct="1"/>
             <a:r>
-              <a:rPr lang="ru-RU" smtClean="0"/>
+              <a:rPr lang="ru-RU"/>
               <a:t>Четвертый уровень</a:t>
             </a:r>
           </a:p>
           <a:p>
             <a:pPr lvl="4" eaLnBrk="1" latinLnBrk="0" hangingPunct="1"/>
             <a:r>
-              <a:rPr lang="ru-RU" smtClean="0"/>
+              <a:rPr lang="ru-RU"/>
               <a:t>Пятый уровень</a:t>
             </a:r>
             <a:endParaRPr kumimoji="0" lang="en-US"/>
@@ -1118,7 +1134,7 @@
           <a:p>
             <a:fld id="{B4C71EC6-210F-42DE-9C53-41977AD35B3D}" type="datetimeFigureOut">
               <a:rPr lang="ru-RU" smtClean="0"/>
-              <a:t>24.06.2026</a:t>
+              <a:t>25.06.2026</a:t>
             </a:fld>
             <a:endParaRPr lang="ru-RU"/>
           </a:p>
@@ -1212,7 +1228,7 @@
           <a:lstStyle/>
           <a:p>
             <a:r>
-              <a:rPr kumimoji="0" lang="ru-RU" smtClean="0"/>
+              <a:rPr kumimoji="0" lang="ru-RU"/>
               <a:t>Образец заголовка</a:t>
             </a:r>
             <a:endParaRPr kumimoji="0" lang="en-US"/>
@@ -1241,35 +1257,35 @@
           <a:p>
             <a:pPr lvl="0" eaLnBrk="1" latinLnBrk="0" hangingPunct="1"/>
             <a:r>
-              <a:rPr lang="ru-RU" smtClean="0"/>
+              <a:rPr lang="ru-RU"/>
               <a:t>Образец текста</a:t>
             </a:r>
           </a:p>
           <a:p>
             <a:pPr lvl="1" eaLnBrk="1" latinLnBrk="0" hangingPunct="1"/>
             <a:r>
-              <a:rPr lang="ru-RU" smtClean="0"/>
+              <a:rPr lang="ru-RU"/>
               <a:t>Второй уровень</a:t>
             </a:r>
           </a:p>
           <a:p>
             <a:pPr lvl="2" eaLnBrk="1" latinLnBrk="0" hangingPunct="1"/>
             <a:r>
-              <a:rPr lang="ru-RU" smtClean="0"/>
+              <a:rPr lang="ru-RU"/>
               <a:t>Третий уровень</a:t>
             </a:r>
           </a:p>
           <a:p>
             <a:pPr lvl="3" eaLnBrk="1" latinLnBrk="0" hangingPunct="1"/>
             <a:r>
-              <a:rPr lang="ru-RU" smtClean="0"/>
+              <a:rPr lang="ru-RU"/>
               <a:t>Четвертый уровень</a:t>
             </a:r>
           </a:p>
           <a:p>
             <a:pPr lvl="4" eaLnBrk="1" latinLnBrk="0" hangingPunct="1"/>
             <a:r>
-              <a:rPr lang="ru-RU" smtClean="0"/>
+              <a:rPr lang="ru-RU"/>
               <a:t>Пятый уровень</a:t>
             </a:r>
             <a:endParaRPr kumimoji="0" lang="en-US"/>
@@ -1293,7 +1309,7 @@
           <a:p>
             <a:fld id="{B4C71EC6-210F-42DE-9C53-41977AD35B3D}" type="datetimeFigureOut">
               <a:rPr lang="ru-RU" smtClean="0"/>
-              <a:t>24.06.2026</a:t>
+              <a:t>25.06.2026</a:t>
             </a:fld>
             <a:endParaRPr lang="ru-RU"/>
           </a:p>
@@ -1382,7 +1398,7 @@
           <a:lstStyle/>
           <a:p>
             <a:r>
-              <a:rPr kumimoji="0" lang="ru-RU" smtClean="0"/>
+              <a:rPr kumimoji="0" lang="ru-RU"/>
               <a:t>Образец заголовка</a:t>
             </a:r>
             <a:endParaRPr kumimoji="0" lang="en-US"/>
@@ -1411,35 +1427,35 @@
           <a:p>
             <a:pPr lvl="0" eaLnBrk="1" latinLnBrk="0" hangingPunct="1"/>
             <a:r>
-              <a:rPr lang="ru-RU" smtClean="0"/>
+              <a:rPr lang="ru-RU"/>
               <a:t>Образец текста</a:t>
             </a:r>
           </a:p>
           <a:p>
             <a:pPr lvl="1" eaLnBrk="1" latinLnBrk="0" hangingPunct="1"/>
             <a:r>
-              <a:rPr lang="ru-RU" smtClean="0"/>
+              <a:rPr lang="ru-RU"/>
               <a:t>Второй уровень</a:t>
             </a:r>
           </a:p>
           <a:p>
             <a:pPr lvl="2" eaLnBrk="1" latinLnBrk="0" hangingPunct="1"/>
             <a:r>
-              <a:rPr lang="ru-RU" smtClean="0"/>
+              <a:rPr lang="ru-RU"/>
               <a:t>Третий уровень</a:t>
             </a:r>
           </a:p>
           <a:p>
             <a:pPr lvl="3" eaLnBrk="1" latinLnBrk="0" hangingPunct="1"/>
             <a:r>
-              <a:rPr lang="ru-RU" smtClean="0"/>
+              <a:rPr lang="ru-RU"/>
               <a:t>Четвертый уровень</a:t>
             </a:r>
           </a:p>
           <a:p>
             <a:pPr lvl="4" eaLnBrk="1" latinLnBrk="0" hangingPunct="1"/>
             <a:r>
-              <a:rPr lang="ru-RU" smtClean="0"/>
+              <a:rPr lang="ru-RU"/>
               <a:t>Пятый уровень</a:t>
             </a:r>
             <a:endParaRPr kumimoji="0" lang="en-US"/>
@@ -1463,7 +1479,7 @@
           <a:p>
             <a:fld id="{B4C71EC6-210F-42DE-9C53-41977AD35B3D}" type="datetimeFigureOut">
               <a:rPr lang="ru-RU" smtClean="0"/>
-              <a:t>24.06.2026</a:t>
+              <a:t>25.06.2026</a:t>
             </a:fld>
             <a:endParaRPr lang="ru-RU"/>
           </a:p>
@@ -1562,7 +1578,7 @@
           </a:lstStyle>
           <a:p>
             <a:r>
-              <a:rPr kumimoji="0" lang="ru-RU" smtClean="0"/>
+              <a:rPr kumimoji="0" lang="ru-RU"/>
               <a:t>Образец заголовка</a:t>
             </a:r>
             <a:endParaRPr kumimoji="0" lang="en-US"/>
@@ -1640,7 +1656,7 @@
           <a:p>
             <a:pPr lvl="0" eaLnBrk="1" latinLnBrk="0" hangingPunct="1"/>
             <a:r>
-              <a:rPr kumimoji="0" lang="ru-RU" smtClean="0"/>
+              <a:rPr kumimoji="0" lang="ru-RU"/>
               <a:t>Образец текста</a:t>
             </a:r>
           </a:p>
@@ -1668,7 +1684,7 @@
           <a:p>
             <a:fld id="{B4C71EC6-210F-42DE-9C53-41977AD35B3D}" type="datetimeFigureOut">
               <a:rPr lang="ru-RU" smtClean="0"/>
-              <a:t>24.06.2026</a:t>
+              <a:t>25.06.2026</a:t>
             </a:fld>
             <a:endParaRPr lang="ru-RU"/>
           </a:p>
@@ -2458,7 +2474,7 @@
           <a:lstStyle/>
           <a:p>
             <a:r>
-              <a:rPr kumimoji="0" lang="ru-RU" smtClean="0"/>
+              <a:rPr kumimoji="0" lang="ru-RU"/>
               <a:t>Образец заголовка</a:t>
             </a:r>
             <a:endParaRPr kumimoji="0" lang="en-US"/>
@@ -2482,7 +2498,7 @@
           <a:p>
             <a:fld id="{B4C71EC6-210F-42DE-9C53-41977AD35B3D}" type="datetimeFigureOut">
               <a:rPr lang="ru-RU" smtClean="0"/>
-              <a:t>24.06.2026</a:t>
+              <a:t>25.06.2026</a:t>
             </a:fld>
             <a:endParaRPr lang="ru-RU"/>
           </a:p>
@@ -2552,35 +2568,35 @@
           <a:p>
             <a:pPr lvl="0" eaLnBrk="1" latinLnBrk="0" hangingPunct="1"/>
             <a:r>
-              <a:rPr lang="ru-RU" smtClean="0"/>
+              <a:rPr lang="ru-RU"/>
               <a:t>Образец текста</a:t>
             </a:r>
           </a:p>
           <a:p>
             <a:pPr lvl="1" eaLnBrk="1" latinLnBrk="0" hangingPunct="1"/>
             <a:r>
-              <a:rPr lang="ru-RU" smtClean="0"/>
+              <a:rPr lang="ru-RU"/>
               <a:t>Второй уровень</a:t>
             </a:r>
           </a:p>
           <a:p>
             <a:pPr lvl="2" eaLnBrk="1" latinLnBrk="0" hangingPunct="1"/>
             <a:r>
-              <a:rPr lang="ru-RU" smtClean="0"/>
+              <a:rPr lang="ru-RU"/>
               <a:t>Третий уровень</a:t>
             </a:r>
           </a:p>
           <a:p>
             <a:pPr lvl="3" eaLnBrk="1" latinLnBrk="0" hangingPunct="1"/>
             <a:r>
-              <a:rPr lang="ru-RU" smtClean="0"/>
+              <a:rPr lang="ru-RU"/>
               <a:t>Четвертый уровень</a:t>
             </a:r>
           </a:p>
           <a:p>
             <a:pPr lvl="4" eaLnBrk="1" latinLnBrk="0" hangingPunct="1"/>
             <a:r>
-              <a:rPr lang="ru-RU" smtClean="0"/>
+              <a:rPr lang="ru-RU"/>
               <a:t>Пятый уровень</a:t>
             </a:r>
             <a:endParaRPr kumimoji="0" lang="en-US"/>
@@ -2609,35 +2625,35 @@
           <a:p>
             <a:pPr lvl="0" eaLnBrk="1" latinLnBrk="0" hangingPunct="1"/>
             <a:r>
-              <a:rPr lang="ru-RU" smtClean="0"/>
+              <a:rPr lang="ru-RU"/>
               <a:t>Образец текста</a:t>
             </a:r>
           </a:p>
           <a:p>
             <a:pPr lvl="1" eaLnBrk="1" latinLnBrk="0" hangingPunct="1"/>
             <a:r>
-              <a:rPr lang="ru-RU" smtClean="0"/>
+              <a:rPr lang="ru-RU"/>
               <a:t>Второй уровень</a:t>
             </a:r>
           </a:p>
           <a:p>
             <a:pPr lvl="2" eaLnBrk="1" latinLnBrk="0" hangingPunct="1"/>
             <a:r>
-              <a:rPr lang="ru-RU" smtClean="0"/>
+              <a:rPr lang="ru-RU"/>
               <a:t>Третий уровень</a:t>
             </a:r>
           </a:p>
           <a:p>
             <a:pPr lvl="3" eaLnBrk="1" latinLnBrk="0" hangingPunct="1"/>
             <a:r>
-              <a:rPr lang="ru-RU" smtClean="0"/>
+              <a:rPr lang="ru-RU"/>
               <a:t>Четвертый уровень</a:t>
             </a:r>
           </a:p>
           <a:p>
             <a:pPr lvl="4" eaLnBrk="1" latinLnBrk="0" hangingPunct="1"/>
             <a:r>
-              <a:rPr lang="ru-RU" smtClean="0"/>
+              <a:rPr lang="ru-RU"/>
               <a:t>Пятый уровень</a:t>
             </a:r>
             <a:endParaRPr kumimoji="0" lang="en-US"/>
@@ -2694,7 +2710,7 @@
           </a:lstStyle>
           <a:p>
             <a:r>
-              <a:rPr kumimoji="0" lang="ru-RU" smtClean="0"/>
+              <a:rPr kumimoji="0" lang="ru-RU"/>
               <a:t>Образец заголовка</a:t>
             </a:r>
             <a:endParaRPr kumimoji="0" lang="en-US"/>
@@ -2718,7 +2734,7 @@
           <a:p>
             <a:fld id="{B4C71EC6-210F-42DE-9C53-41977AD35B3D}" type="datetimeFigureOut">
               <a:rPr lang="ru-RU" smtClean="0"/>
-              <a:t>24.06.2026</a:t>
+              <a:t>25.06.2026</a:t>
             </a:fld>
             <a:endParaRPr lang="ru-RU"/>
           </a:p>
@@ -2788,35 +2804,35 @@
           <a:p>
             <a:pPr lvl="0" eaLnBrk="1" latinLnBrk="0" hangingPunct="1"/>
             <a:r>
-              <a:rPr lang="ru-RU" smtClean="0"/>
+              <a:rPr lang="ru-RU"/>
               <a:t>Образец текста</a:t>
             </a:r>
           </a:p>
           <a:p>
             <a:pPr lvl="1" eaLnBrk="1" latinLnBrk="0" hangingPunct="1"/>
             <a:r>
-              <a:rPr lang="ru-RU" smtClean="0"/>
+              <a:rPr lang="ru-RU"/>
               <a:t>Второй уровень</a:t>
             </a:r>
           </a:p>
           <a:p>
             <a:pPr lvl="2" eaLnBrk="1" latinLnBrk="0" hangingPunct="1"/>
             <a:r>
-              <a:rPr lang="ru-RU" smtClean="0"/>
+              <a:rPr lang="ru-RU"/>
               <a:t>Третий уровень</a:t>
             </a:r>
           </a:p>
           <a:p>
             <a:pPr lvl="3" eaLnBrk="1" latinLnBrk="0" hangingPunct="1"/>
             <a:r>
-              <a:rPr lang="ru-RU" smtClean="0"/>
+              <a:rPr lang="ru-RU"/>
               <a:t>Четвертый уровень</a:t>
             </a:r>
           </a:p>
           <a:p>
             <a:pPr lvl="4" eaLnBrk="1" latinLnBrk="0" hangingPunct="1"/>
             <a:r>
-              <a:rPr lang="ru-RU" smtClean="0"/>
+              <a:rPr lang="ru-RU"/>
               <a:t>Пятый уровень</a:t>
             </a:r>
             <a:endParaRPr kumimoji="0" lang="en-US"/>
@@ -2845,35 +2861,35 @@
           <a:p>
             <a:pPr lvl="0" eaLnBrk="1" latinLnBrk="0" hangingPunct="1"/>
             <a:r>
-              <a:rPr lang="ru-RU" smtClean="0"/>
+              <a:rPr lang="ru-RU"/>
               <a:t>Образец текста</a:t>
             </a:r>
           </a:p>
           <a:p>
             <a:pPr lvl="1" eaLnBrk="1" latinLnBrk="0" hangingPunct="1"/>
             <a:r>
-              <a:rPr lang="ru-RU" smtClean="0"/>
+              <a:rPr lang="ru-RU"/>
               <a:t>Второй уровень</a:t>
             </a:r>
           </a:p>
           <a:p>
             <a:pPr lvl="2" eaLnBrk="1" latinLnBrk="0" hangingPunct="1"/>
             <a:r>
-              <a:rPr lang="ru-RU" smtClean="0"/>
+              <a:rPr lang="ru-RU"/>
               <a:t>Третий уровень</a:t>
             </a:r>
           </a:p>
           <a:p>
             <a:pPr lvl="3" eaLnBrk="1" latinLnBrk="0" hangingPunct="1"/>
             <a:r>
-              <a:rPr lang="ru-RU" smtClean="0"/>
+              <a:rPr lang="ru-RU"/>
               <a:t>Четвертый уровень</a:t>
             </a:r>
           </a:p>
           <a:p>
             <a:pPr lvl="4" eaLnBrk="1" latinLnBrk="0" hangingPunct="1"/>
             <a:r>
-              <a:rPr lang="ru-RU" smtClean="0"/>
+              <a:rPr lang="ru-RU"/>
               <a:t>Пятый уровень</a:t>
             </a:r>
             <a:endParaRPr kumimoji="0" lang="en-US"/>
@@ -2922,7 +2938,7 @@
           <a:p>
             <a:pPr lvl="0" eaLnBrk="1" latinLnBrk="0" hangingPunct="1"/>
             <a:r>
-              <a:rPr kumimoji="0" lang="ru-RU" smtClean="0"/>
+              <a:rPr kumimoji="0" lang="ru-RU"/>
               <a:t>Образец текста</a:t>
             </a:r>
           </a:p>
@@ -2970,7 +2986,7 @@
           <a:p>
             <a:pPr lvl="0" eaLnBrk="1" latinLnBrk="0" hangingPunct="1"/>
             <a:r>
-              <a:rPr kumimoji="0" lang="ru-RU" smtClean="0"/>
+              <a:rPr kumimoji="0" lang="ru-RU"/>
               <a:t>Образец текста</a:t>
             </a:r>
           </a:p>
@@ -3017,7 +3033,7 @@
           <a:lstStyle/>
           <a:p>
             <a:r>
-              <a:rPr kumimoji="0" lang="ru-RU" smtClean="0"/>
+              <a:rPr kumimoji="0" lang="ru-RU"/>
               <a:t>Образец заголовка</a:t>
             </a:r>
             <a:endParaRPr kumimoji="0" lang="en-US"/>
@@ -3041,7 +3057,7 @@
           <a:p>
             <a:fld id="{B4C71EC6-210F-42DE-9C53-41977AD35B3D}" type="datetimeFigureOut">
               <a:rPr lang="ru-RU" smtClean="0"/>
-              <a:t>24.06.2026</a:t>
+              <a:t>25.06.2026</a:t>
             </a:fld>
             <a:endParaRPr lang="ru-RU"/>
           </a:p>
@@ -3131,7 +3147,7 @@
           <a:p>
             <a:fld id="{B4C71EC6-210F-42DE-9C53-41977AD35B3D}" type="datetimeFigureOut">
               <a:rPr lang="ru-RU" smtClean="0"/>
-              <a:t>24.06.2026</a:t>
+              <a:t>25.06.2026</a:t>
             </a:fld>
             <a:endParaRPr lang="ru-RU"/>
           </a:p>
@@ -3269,7 +3285,7 @@
           </a:lstStyle>
           <a:p>
             <a:r>
-              <a:rPr kumimoji="0" lang="ru-RU" smtClean="0"/>
+              <a:rPr kumimoji="0" lang="ru-RU"/>
               <a:t>Образец заголовка</a:t>
             </a:r>
             <a:endParaRPr kumimoji="0" lang="en-US"/>
@@ -3325,7 +3341,7 @@
           <a:p>
             <a:pPr lvl="0" eaLnBrk="1" latinLnBrk="0" hangingPunct="1"/>
             <a:r>
-              <a:rPr kumimoji="0" lang="ru-RU" smtClean="0"/>
+              <a:rPr kumimoji="0" lang="ru-RU"/>
               <a:t>Образец текста</a:t>
             </a:r>
           </a:p>
@@ -3591,35 +3607,35 @@
           <a:p>
             <a:pPr lvl="0" eaLnBrk="1" latinLnBrk="0" hangingPunct="1"/>
             <a:r>
-              <a:rPr lang="ru-RU" smtClean="0"/>
+              <a:rPr lang="ru-RU"/>
               <a:t>Образец текста</a:t>
             </a:r>
           </a:p>
           <a:p>
             <a:pPr lvl="1" eaLnBrk="1" latinLnBrk="0" hangingPunct="1"/>
             <a:r>
-              <a:rPr lang="ru-RU" smtClean="0"/>
+              <a:rPr lang="ru-RU"/>
               <a:t>Второй уровень</a:t>
             </a:r>
           </a:p>
           <a:p>
             <a:pPr lvl="2" eaLnBrk="1" latinLnBrk="0" hangingPunct="1"/>
             <a:r>
-              <a:rPr lang="ru-RU" smtClean="0"/>
+              <a:rPr lang="ru-RU"/>
               <a:t>Третий уровень</a:t>
             </a:r>
           </a:p>
           <a:p>
             <a:pPr lvl="3" eaLnBrk="1" latinLnBrk="0" hangingPunct="1"/>
             <a:r>
-              <a:rPr lang="ru-RU" smtClean="0"/>
+              <a:rPr lang="ru-RU"/>
               <a:t>Четвертый уровень</a:t>
             </a:r>
           </a:p>
           <a:p>
             <a:pPr lvl="4" eaLnBrk="1" latinLnBrk="0" hangingPunct="1"/>
             <a:r>
-              <a:rPr lang="ru-RU" smtClean="0"/>
+              <a:rPr lang="ru-RU"/>
               <a:t>Пятый уровень</a:t>
             </a:r>
             <a:endParaRPr kumimoji="0" lang="en-US"/>
@@ -3643,7 +3659,7 @@
           <a:p>
             <a:fld id="{B4C71EC6-210F-42DE-9C53-41977AD35B3D}" type="datetimeFigureOut">
               <a:rPr lang="ru-RU" smtClean="0"/>
-              <a:t>24.06.2026</a:t>
+              <a:t>25.06.2026</a:t>
             </a:fld>
             <a:endParaRPr lang="ru-RU"/>
           </a:p>
@@ -3823,7 +3839,7 @@
           </a:lstStyle>
           <a:p>
             <a:r>
-              <a:rPr kumimoji="0" lang="ru-RU" smtClean="0"/>
+              <a:rPr kumimoji="0" lang="ru-RU"/>
               <a:t>Образец заголовка</a:t>
             </a:r>
             <a:endParaRPr kumimoji="0" lang="en-US"/>
@@ -3882,7 +3898,7 @@
               <a:buNone/>
             </a:pPr>
             <a:r>
-              <a:rPr kumimoji="0" lang="ru-RU" smtClean="0"/>
+              <a:rPr kumimoji="0" lang="ru-RU"/>
               <a:t>Вставка рисунка</a:t>
             </a:r>
             <a:endParaRPr kumimoji="0" lang="en-US" dirty="0"/>
@@ -3937,7 +3953,7 @@
           <a:p>
             <a:pPr lvl="0" eaLnBrk="1" latinLnBrk="0" hangingPunct="1"/>
             <a:r>
-              <a:rPr kumimoji="0" lang="ru-RU" smtClean="0"/>
+              <a:rPr kumimoji="0" lang="ru-RU"/>
               <a:t>Образец текста</a:t>
             </a:r>
           </a:p>
@@ -4154,7 +4170,7 @@
           <a:p>
             <a:fld id="{B4C71EC6-210F-42DE-9C53-41977AD35B3D}" type="datetimeFigureOut">
               <a:rPr lang="ru-RU" smtClean="0"/>
-              <a:t>24.06.2026</a:t>
+              <a:t>25.06.2026</a:t>
             </a:fld>
             <a:endParaRPr lang="ru-RU"/>
           </a:p>
@@ -4297,7 +4313,7 @@
           <a:lstStyle/>
           <a:p>
             <a:r>
-              <a:rPr kumimoji="0" lang="ru-RU" smtClean="0"/>
+              <a:rPr kumimoji="0" lang="ru-RU"/>
               <a:t>Образец заголовка</a:t>
             </a:r>
             <a:endParaRPr kumimoji="0" lang="en-US"/>
@@ -4331,35 +4347,35 @@
           <a:p>
             <a:pPr lvl="0" eaLnBrk="1" latinLnBrk="0" hangingPunct="1"/>
             <a:r>
-              <a:rPr kumimoji="0" lang="ru-RU" smtClean="0"/>
+              <a:rPr kumimoji="0" lang="ru-RU"/>
               <a:t>Образец текста</a:t>
             </a:r>
           </a:p>
           <a:p>
             <a:pPr lvl="1" eaLnBrk="1" latinLnBrk="0" hangingPunct="1"/>
             <a:r>
-              <a:rPr kumimoji="0" lang="ru-RU" smtClean="0"/>
+              <a:rPr kumimoji="0" lang="ru-RU"/>
               <a:t>Второй уровень</a:t>
             </a:r>
           </a:p>
           <a:p>
             <a:pPr lvl="2" eaLnBrk="1" latinLnBrk="0" hangingPunct="1"/>
             <a:r>
-              <a:rPr kumimoji="0" lang="ru-RU" smtClean="0"/>
+              <a:rPr kumimoji="0" lang="ru-RU"/>
               <a:t>Третий уровень</a:t>
             </a:r>
           </a:p>
           <a:p>
             <a:pPr lvl="3" eaLnBrk="1" latinLnBrk="0" hangingPunct="1"/>
             <a:r>
-              <a:rPr kumimoji="0" lang="ru-RU" smtClean="0"/>
+              <a:rPr kumimoji="0" lang="ru-RU"/>
               <a:t>Четвертый уровень</a:t>
             </a:r>
           </a:p>
           <a:p>
             <a:pPr lvl="4" eaLnBrk="1" latinLnBrk="0" hangingPunct="1"/>
             <a:r>
-              <a:rPr kumimoji="0" lang="ru-RU" smtClean="0"/>
+              <a:rPr kumimoji="0" lang="ru-RU"/>
               <a:t>Пятый уровень</a:t>
             </a:r>
             <a:endParaRPr kumimoji="0" lang="en-US"/>
@@ -4399,7 +4415,7 @@
           <a:p>
             <a:fld id="{B4C71EC6-210F-42DE-9C53-41977AD35B3D}" type="datetimeFigureOut">
               <a:rPr lang="ru-RU" smtClean="0"/>
-              <a:t>24.06.2026</a:t>
+              <a:t>25.06.2026</a:t>
             </a:fld>
             <a:endParaRPr lang="ru-RU"/>
           </a:p>
@@ -5198,7 +5214,7 @@
           <a:p>
             <a:pPr algn="ctr"/>
             <a:r>
-              <a:rPr lang="ru-RU" sz="2000" dirty="0" smtClean="0">
+              <a:rPr lang="ru-RU" sz="2000" dirty="0">
                 <a:solidFill>
                   <a:schemeClr val="tx2"/>
                 </a:solidFill>
@@ -5211,7 +5227,7 @@
           <a:p>
             <a:pPr algn="ctr"/>
             <a:r>
-              <a:rPr lang="ru-RU" sz="2000" dirty="0" smtClean="0">
+              <a:rPr lang="ru-RU" sz="2000" dirty="0">
                 <a:solidFill>
                   <a:schemeClr val="tx2"/>
                 </a:solidFill>
@@ -5224,7 +5240,7 @@
           <a:p>
             <a:pPr algn="ctr"/>
             <a:r>
-              <a:rPr lang="ru-RU" sz="2800" dirty="0" smtClean="0">
+              <a:rPr lang="ru-RU" sz="2800" dirty="0">
                 <a:solidFill>
                   <a:schemeClr val="tx2"/>
                 </a:solidFill>
@@ -5233,13 +5249,6 @@
               </a:rPr>
               <a:t>Ищу Кота.</a:t>
             </a:r>
-            <a:endParaRPr lang="ru-RU" sz="2800" dirty="0">
-              <a:solidFill>
-                <a:schemeClr val="tx2"/>
-              </a:solidFill>
-              <a:latin typeface="Times New Roman" panose="02020603050405020304" pitchFamily="18" charset="0"/>
-              <a:cs typeface="Times New Roman" panose="02020603050405020304" pitchFamily="18" charset="0"/>
-            </a:endParaRPr>
           </a:p>
         </p:txBody>
       </p:sp>
@@ -5288,7 +5297,7 @@
           </a:p>
           <a:p>
             <a:r>
-              <a:rPr lang="ru-RU" sz="1400" dirty="0" smtClean="0">
+              <a:rPr lang="ru-RU" sz="1400" dirty="0">
                 <a:solidFill>
                   <a:schemeClr val="tx2"/>
                 </a:solidFill>
@@ -5307,20 +5316,10 @@
                 <a:latin typeface="Times New Roman" panose="02020603050405020304" pitchFamily="18" charset="0"/>
                 <a:cs typeface="Times New Roman" panose="02020603050405020304" pitchFamily="18" charset="0"/>
               </a:rPr>
-              <a:t>ф</a:t>
-            </a:r>
-            <a:r>
-              <a:rPr lang="ru-RU" sz="1400" dirty="0" smtClean="0">
-                <a:solidFill>
-                  <a:schemeClr val="tx2"/>
-                </a:solidFill>
-                <a:latin typeface="Times New Roman" panose="02020603050405020304" pitchFamily="18" charset="0"/>
-                <a:cs typeface="Times New Roman" panose="02020603050405020304" pitchFamily="18" charset="0"/>
-              </a:rPr>
-              <a:t>акультет прикладной информатики </a:t>
-            </a:r>
-            <a:r>
-              <a:rPr lang="ru-RU" sz="1400" dirty="0" err="1" smtClean="0">
+              <a:t>факультет прикладной информатики </a:t>
+            </a:r>
+            <a:r>
+              <a:rPr lang="ru-RU" sz="1400" dirty="0" err="1">
                 <a:solidFill>
                   <a:schemeClr val="tx2"/>
                 </a:solidFill>
@@ -5328,55 +5327,6 @@
                 <a:cs typeface="Times New Roman" panose="02020603050405020304" pitchFamily="18" charset="0"/>
               </a:rPr>
               <a:t>ИВТиПТ</a:t>
-            </a:r>
-            <a:endParaRPr lang="ru-RU" sz="1400" dirty="0" smtClean="0">
-              <a:solidFill>
-                <a:schemeClr val="tx2"/>
-              </a:solidFill>
-              <a:latin typeface="Times New Roman" panose="02020603050405020304" pitchFamily="18" charset="0"/>
-              <a:cs typeface="Times New Roman" panose="02020603050405020304" pitchFamily="18" charset="0"/>
-            </a:endParaRPr>
-          </a:p>
-          <a:p>
-            <a:r>
-              <a:rPr lang="ru-RU" sz="1400" dirty="0">
-                <a:solidFill>
-                  <a:schemeClr val="tx2"/>
-                </a:solidFill>
-                <a:latin typeface="Times New Roman" panose="02020603050405020304" pitchFamily="18" charset="0"/>
-                <a:cs typeface="Times New Roman" panose="02020603050405020304" pitchFamily="18" charset="0"/>
-              </a:rPr>
-              <a:t>Руководитель: </a:t>
-            </a:r>
-            <a:r>
-              <a:rPr lang="ru-RU" sz="1400" dirty="0" smtClean="0">
-                <a:solidFill>
-                  <a:schemeClr val="tx2"/>
-                </a:solidFill>
-                <a:latin typeface="Times New Roman" panose="02020603050405020304" pitchFamily="18" charset="0"/>
-                <a:cs typeface="Times New Roman" panose="02020603050405020304" pitchFamily="18" charset="0"/>
-              </a:rPr>
-              <a:t>доцент кафедры </a:t>
-            </a:r>
-            <a:r>
-              <a:rPr lang="ru-RU" sz="1400" dirty="0">
-                <a:solidFill>
-                  <a:schemeClr val="tx2"/>
-                </a:solidFill>
-                <a:latin typeface="Times New Roman" panose="02020603050405020304" pitchFamily="18" charset="0"/>
-                <a:cs typeface="Times New Roman" panose="02020603050405020304" pitchFamily="18" charset="0"/>
-              </a:rPr>
-              <a:t>Петренко О.А</a:t>
-            </a:r>
-            <a:r>
-              <a:rPr lang="ru-RU" sz="1400" dirty="0" smtClean="0">
-                <a:solidFill>
-                  <a:schemeClr val="tx2"/>
-                </a:solidFill>
-                <a:latin typeface="Times New Roman" panose="02020603050405020304" pitchFamily="18" charset="0"/>
-                <a:cs typeface="Times New Roman" panose="02020603050405020304" pitchFamily="18" charset="0"/>
-              </a:rPr>
-              <a:t>.</a:t>
             </a:r>
             <a:endParaRPr lang="ru-RU" sz="1400" dirty="0">
               <a:solidFill>
@@ -5386,6 +5336,18 @@
               <a:cs typeface="Times New Roman" panose="02020603050405020304" pitchFamily="18" charset="0"/>
             </a:endParaRPr>
           </a:p>
+          <a:p>
+            <a:r>
+              <a:rPr lang="ru-RU" sz="1400" dirty="0">
+                <a:solidFill>
+                  <a:schemeClr val="tx2"/>
+                </a:solidFill>
+                <a:latin typeface="Times New Roman" panose="02020603050405020304" pitchFamily="18" charset="0"/>
+                <a:cs typeface="Times New Roman" panose="02020603050405020304" pitchFamily="18" charset="0"/>
+              </a:rPr>
+              <a:t>Руководитель: доцент кафедры Петренко О.А.</a:t>
+            </a:r>
+          </a:p>
         </p:txBody>
       </p:sp>
       <p:sp>
@@ -5410,7 +5372,7 @@
           <a:lstStyle/>
           <a:p>
             <a:r>
-              <a:rPr lang="ru-RU" sz="1400" dirty="0" smtClean="0">
+              <a:rPr lang="ru-RU" sz="1400" dirty="0">
                 <a:solidFill>
                   <a:schemeClr val="tx2"/>
                 </a:solidFill>
@@ -5419,13 +5381,6 @@
               </a:rPr>
               <a:t>25.06.2026	Ростов-на-Дону</a:t>
             </a:r>
-            <a:endParaRPr lang="ru-RU" sz="1400" dirty="0">
-              <a:solidFill>
-                <a:schemeClr val="tx2"/>
-              </a:solidFill>
-              <a:latin typeface="Times New Roman" panose="02020603050405020304" pitchFamily="18" charset="0"/>
-              <a:cs typeface="Times New Roman" panose="02020603050405020304" pitchFamily="18" charset="0"/>
-            </a:endParaRPr>
           </a:p>
         </p:txBody>
       </p:sp>
@@ -5439,13 +5394,6 @@
   <p:clrMapOvr>
     <a:masterClrMapping/>
   </p:clrMapOvr>
-  <p:timing>
-    <p:tnLst>
-      <p:par>
-        <p:cTn id="1" dur="indefinite" restart="never" nodeType="tmRoot"/>
-      </p:par>
-    </p:tnLst>
-  </p:timing>
 </p:sld>
 </file>
 
@@ -5489,16 +5437,12 @@
           <a:lstStyle/>
           <a:p>
             <a:r>
-              <a:rPr lang="ru-RU" sz="2800" dirty="0" smtClean="0">
+              <a:rPr lang="ru-RU" sz="2800" dirty="0">
                 <a:latin typeface="Times New Roman" panose="02020603050405020304" pitchFamily="18" charset="0"/>
                 <a:cs typeface="Times New Roman" panose="02020603050405020304" pitchFamily="18" charset="0"/>
               </a:rPr>
               <a:t>Вывод</a:t>
             </a:r>
-            <a:endParaRPr lang="ru-RU" sz="2800" dirty="0">
-              <a:latin typeface="Times New Roman" panose="02020603050405020304" pitchFamily="18" charset="0"/>
-              <a:cs typeface="Times New Roman" panose="02020603050405020304" pitchFamily="18" charset="0"/>
-            </a:endParaRPr>
           </a:p>
         </p:txBody>
       </p:sp>
@@ -5580,7 +5524,7 @@
                 <a:latin typeface="Times New Roman" panose="02020603050405020304" pitchFamily="18" charset="0"/>
                 <a:cs typeface="Times New Roman" panose="02020603050405020304" pitchFamily="18" charset="0"/>
               </a:rPr>
-              <a:t>, который позволяет за секунды обрабатывать тысячи записей, заменяя часы ручной работы сотрудников.</a:t>
+              <a:t>, который позволяет за секунды обрабатывать тысячи записей.</a:t>
             </a:r>
           </a:p>
           <a:p>
@@ -5626,7 +5570,21 @@
                 <a:latin typeface="Times New Roman" panose="02020603050405020304" pitchFamily="18" charset="0"/>
                 <a:cs typeface="Times New Roman" panose="02020603050405020304" pitchFamily="18" charset="0"/>
               </a:rPr>
-              <a:t>построена модель ALS, для каждого пользователя сгенерировано 5 рекомендаций.</a:t>
+              <a:t>построена модель ALS, для каждого пользователя сгенерировано </a:t>
+            </a:r>
+            <a:r>
+              <a:rPr lang="en-US" sz="1400" b="0" dirty="0">
+                <a:latin typeface="Times New Roman" panose="02020603050405020304" pitchFamily="18" charset="0"/>
+                <a:cs typeface="Times New Roman" panose="02020603050405020304" pitchFamily="18" charset="0"/>
+              </a:rPr>
+              <a:t>20</a:t>
+            </a:r>
+            <a:r>
+              <a:rPr lang="ru-RU" sz="1400" b="0" dirty="0">
+                <a:latin typeface="Times New Roman" panose="02020603050405020304" pitchFamily="18" charset="0"/>
+                <a:cs typeface="Times New Roman" panose="02020603050405020304" pitchFamily="18" charset="0"/>
+              </a:rPr>
+              <a:t> рекомендаций.</a:t>
             </a:r>
           </a:p>
           <a:p>
@@ -5749,7 +5707,7 @@
         </p:blipFill>
         <p:spPr bwMode="auto">
           <a:xfrm>
-            <a:off x="2281637" y="843558"/>
+            <a:off x="2290386" y="868022"/>
             <a:ext cx="265390" cy="265390"/>
           </a:xfrm>
           <a:prstGeom prst="rect">
@@ -5779,7 +5737,7 @@
         </p:blipFill>
         <p:spPr bwMode="auto">
           <a:xfrm>
-            <a:off x="2281637" y="1563638"/>
+            <a:off x="2290386" y="1586280"/>
             <a:ext cx="265390" cy="265390"/>
           </a:xfrm>
           <a:prstGeom prst="rect">
@@ -5809,7 +5767,7 @@
         </p:blipFill>
         <p:spPr bwMode="auto">
           <a:xfrm>
-            <a:off x="2281637" y="2280881"/>
+            <a:off x="2290386" y="2074375"/>
             <a:ext cx="265390" cy="265390"/>
           </a:xfrm>
           <a:prstGeom prst="rect">
@@ -5839,7 +5797,7 @@
         </p:blipFill>
         <p:spPr bwMode="auto">
           <a:xfrm>
-            <a:off x="2281637" y="2763699"/>
+            <a:off x="2290386" y="2589289"/>
             <a:ext cx="265390" cy="265390"/>
           </a:xfrm>
           <a:prstGeom prst="rect">
@@ -5869,7 +5827,7 @@
         </p:blipFill>
         <p:spPr bwMode="auto">
           <a:xfrm>
-            <a:off x="2281637" y="3291830"/>
+            <a:off x="2290386" y="3075922"/>
             <a:ext cx="265390" cy="265390"/>
           </a:xfrm>
           <a:prstGeom prst="rect">
@@ -5899,7 +5857,7 @@
         </p:blipFill>
         <p:spPr bwMode="auto">
           <a:xfrm>
-            <a:off x="2281637" y="3795886"/>
+            <a:off x="2290386" y="3562555"/>
             <a:ext cx="265390" cy="265390"/>
           </a:xfrm>
           <a:prstGeom prst="rect">
@@ -5917,13 +5875,6 @@
   <p:clrMapOvr>
     <a:masterClrMapping/>
   </p:clrMapOvr>
-  <p:timing>
-    <p:tnLst>
-      <p:par>
-        <p:cTn id="1" dur="indefinite" restart="never" nodeType="tmRoot"/>
-      </p:par>
-    </p:tnLst>
-  </p:timing>
 </p:sld>
 </file>
 
@@ -5968,7 +5919,7 @@
           <a:p>
             <a:pPr algn="ctr"/>
             <a:r>
-              <a:rPr lang="ru-RU" sz="3600" b="1" dirty="0" smtClean="0">
+              <a:rPr lang="ru-RU" sz="3600" b="1" dirty="0">
                 <a:solidFill>
                   <a:schemeClr val="tx2"/>
                 </a:solidFill>
@@ -5977,13 +5928,6 @@
               </a:rPr>
               <a:t>Спасибо за внимание!</a:t>
             </a:r>
-            <a:endParaRPr lang="ru-RU" sz="3600" b="1" dirty="0">
-              <a:solidFill>
-                <a:schemeClr val="tx2"/>
-              </a:solidFill>
-              <a:latin typeface="Times New Roman" panose="02020603050405020304" pitchFamily="18" charset="0"/>
-              <a:cs typeface="Times New Roman" panose="02020603050405020304" pitchFamily="18" charset="0"/>
-            </a:endParaRPr>
           </a:p>
         </p:txBody>
       </p:sp>
@@ -6025,7 +5969,6 @@
             <a:noFill/>
           </a:ln>
           <a:effectLst/>
-          <a:extLst/>
         </p:spPr>
       </p:pic>
       <p:pic>
@@ -6164,13 +6107,6 @@
   <p:clrMapOvr>
     <a:masterClrMapping/>
   </p:clrMapOvr>
-  <p:timing>
-    <p:tnLst>
-      <p:par>
-        <p:cTn id="1" dur="indefinite" restart="never" nodeType="tmRoot"/>
-      </p:par>
-    </p:tnLst>
-  </p:timing>
 </p:sld>
 </file>
 
@@ -6214,16 +6150,12 @@
           <a:lstStyle/>
           <a:p>
             <a:r>
-              <a:rPr lang="ru-RU" sz="2800" dirty="0" smtClean="0">
+              <a:rPr lang="ru-RU" sz="2800" dirty="0">
                 <a:latin typeface="Times New Roman" panose="02020603050405020304" pitchFamily="18" charset="0"/>
                 <a:cs typeface="Times New Roman" panose="02020603050405020304" pitchFamily="18" charset="0"/>
               </a:rPr>
               <a:t>Цель</a:t>
             </a:r>
-            <a:endParaRPr lang="ru-RU" sz="2800" dirty="0">
-              <a:latin typeface="Times New Roman" panose="02020603050405020304" pitchFamily="18" charset="0"/>
-              <a:cs typeface="Times New Roman" panose="02020603050405020304" pitchFamily="18" charset="0"/>
-            </a:endParaRPr>
           </a:p>
         </p:txBody>
       </p:sp>
@@ -6250,18 +6182,11 @@
           <a:lstStyle/>
           <a:p>
             <a:r>
-              <a:rPr lang="ru-RU" sz="1600" dirty="0" smtClean="0">
-                <a:latin typeface="Times New Roman" panose="02020603050405020304" pitchFamily="18" charset="0"/>
-                <a:cs typeface="Times New Roman" panose="02020603050405020304" pitchFamily="18" charset="0"/>
-              </a:rPr>
-              <a:t>Задачи</a:t>
-            </a:r>
-            <a:r>
               <a:rPr lang="ru-RU" sz="1600" dirty="0">
                 <a:latin typeface="Times New Roman" panose="02020603050405020304" pitchFamily="18" charset="0"/>
                 <a:cs typeface="Times New Roman" panose="02020603050405020304" pitchFamily="18" charset="0"/>
               </a:rPr>
-              <a:t>:</a:t>
+              <a:t>Задачи:</a:t>
             </a:r>
             <a:endParaRPr lang="ru-RU" sz="1600" b="0" dirty="0">
               <a:latin typeface="Times New Roman" panose="02020603050405020304" pitchFamily="18" charset="0"/>
@@ -6319,11 +6244,11 @@
               <a:t> </a:t>
             </a:r>
             <a:r>
-              <a:rPr lang="ru-RU" sz="1600" b="0" dirty="0" err="1">
-                <a:latin typeface="Times New Roman" panose="02020603050405020304" pitchFamily="18" charset="0"/>
-                <a:cs typeface="Times New Roman" panose="02020603050405020304" pitchFamily="18" charset="0"/>
-              </a:rPr>
-              <a:t>Flume</a:t>
+              <a:rPr lang="en-US" sz="1600" b="0" dirty="0">
+                <a:latin typeface="Times New Roman" panose="02020603050405020304" pitchFamily="18" charset="0"/>
+                <a:cs typeface="Times New Roman" panose="02020603050405020304" pitchFamily="18" charset="0"/>
+              </a:rPr>
+              <a:t>Spark</a:t>
             </a:r>
             <a:r>
               <a:rPr lang="ru-RU" sz="1600" b="0" dirty="0">
@@ -6716,13 +6641,6 @@
   <p:clrMapOvr>
     <a:masterClrMapping/>
   </p:clrMapOvr>
-  <p:timing>
-    <p:tnLst>
-      <p:par>
-        <p:cTn id="1" dur="indefinite" restart="never" nodeType="tmRoot"/>
-      </p:par>
-    </p:tnLst>
-  </p:timing>
 </p:sld>
 </file>
 
@@ -6766,16 +6684,12 @@
           <a:lstStyle/>
           <a:p>
             <a:r>
-              <a:rPr lang="ru-RU" sz="2800" b="1" dirty="0" smtClean="0">
+              <a:rPr lang="ru-RU" sz="2800" b="1" dirty="0">
                 <a:latin typeface="Times New Roman" panose="02020603050405020304" pitchFamily="18" charset="0"/>
                 <a:cs typeface="Times New Roman" panose="02020603050405020304" pitchFamily="18" charset="0"/>
               </a:rPr>
               <a:t>Актуальность</a:t>
             </a:r>
-            <a:endParaRPr lang="ru-RU" sz="2800" b="1" dirty="0">
-              <a:latin typeface="Times New Roman" panose="02020603050405020304" pitchFamily="18" charset="0"/>
-              <a:cs typeface="Times New Roman" panose="02020603050405020304" pitchFamily="18" charset="0"/>
-            </a:endParaRPr>
           </a:p>
         </p:txBody>
       </p:sp>
@@ -6996,13 +6910,6 @@
   <p:clrMapOvr>
     <a:masterClrMapping/>
   </p:clrMapOvr>
-  <p:timing>
-    <p:tnLst>
-      <p:par>
-        <p:cTn id="1" dur="indefinite" restart="never" nodeType="tmRoot"/>
-      </p:par>
-    </p:tnLst>
-  </p:timing>
 </p:sld>
 </file>
 
@@ -7047,16 +6954,12 @@
           <a:p>
             <a:pPr algn="ctr"/>
             <a:r>
-              <a:rPr lang="ru-RU" sz="2800" b="1" dirty="0" smtClean="0">
+              <a:rPr lang="ru-RU" sz="2800" b="1" dirty="0">
                 <a:latin typeface="Times New Roman" panose="02020603050405020304" pitchFamily="18" charset="0"/>
                 <a:cs typeface="Times New Roman" panose="02020603050405020304" pitchFamily="18" charset="0"/>
               </a:rPr>
               <a:t>Выдвигаемые гипотезы</a:t>
             </a:r>
-            <a:endParaRPr lang="ru-RU" sz="2800" b="1" dirty="0">
-              <a:latin typeface="Times New Roman" panose="02020603050405020304" pitchFamily="18" charset="0"/>
-              <a:cs typeface="Times New Roman" panose="02020603050405020304" pitchFamily="18" charset="0"/>
-            </a:endParaRPr>
           </a:p>
         </p:txBody>
       </p:sp>
@@ -7083,7 +6986,7 @@
           <a:lstStyle/>
           <a:p>
             <a:r>
-              <a:rPr lang="ru-RU" sz="1800" dirty="0" smtClean="0">
+              <a:rPr lang="ru-RU" sz="1800" dirty="0">
                 <a:solidFill>
                   <a:schemeClr val="tx2"/>
                 </a:solidFill>
@@ -7092,13 +6995,6 @@
               </a:rPr>
               <a:t>Мы предположили, что визуализация и фильтр качеств кота для каждого пользователя положительно влияет на скорость усыновления.</a:t>
             </a:r>
-            <a:endParaRPr lang="ru-RU" sz="1800" dirty="0">
-              <a:solidFill>
-                <a:schemeClr val="tx2"/>
-              </a:solidFill>
-              <a:latin typeface="Times New Roman" panose="02020603050405020304" pitchFamily="18" charset="0"/>
-              <a:cs typeface="Times New Roman" panose="02020603050405020304" pitchFamily="18" charset="0"/>
-            </a:endParaRPr>
           </a:p>
         </p:txBody>
       </p:sp>
@@ -7125,7 +7021,7 @@
           <a:lstStyle/>
           <a:p>
             <a:r>
-              <a:rPr lang="ru-RU" sz="1800" dirty="0" smtClean="0">
+              <a:rPr lang="ru-RU" sz="1800" dirty="0">
                 <a:solidFill>
                   <a:schemeClr val="tx2"/>
                 </a:solidFill>
@@ -7134,13 +7030,6 @@
               </a:rPr>
               <a:t>Мы выдвинули предположение, что некоторые качества напрямую влияют на шанс усыновления того или иного кота.</a:t>
             </a:r>
-            <a:endParaRPr lang="ru-RU" sz="1800" dirty="0">
-              <a:solidFill>
-                <a:schemeClr val="tx2"/>
-              </a:solidFill>
-              <a:latin typeface="Times New Roman" panose="02020603050405020304" pitchFamily="18" charset="0"/>
-              <a:cs typeface="Times New Roman" panose="02020603050405020304" pitchFamily="18" charset="0"/>
-            </a:endParaRPr>
           </a:p>
         </p:txBody>
       </p:sp>
@@ -7165,16 +7054,12 @@
           <a:lstStyle/>
           <a:p>
             <a:r>
-              <a:rPr lang="ru-RU" dirty="0" smtClean="0">
+              <a:rPr lang="ru-RU" dirty="0">
                 <a:latin typeface="Times New Roman" panose="02020603050405020304" pitchFamily="18" charset="0"/>
                 <a:cs typeface="Times New Roman" panose="02020603050405020304" pitchFamily="18" charset="0"/>
               </a:rPr>
               <a:t>Рекомендации</a:t>
             </a:r>
-            <a:endParaRPr lang="ru-RU" dirty="0">
-              <a:latin typeface="Times New Roman" panose="02020603050405020304" pitchFamily="18" charset="0"/>
-              <a:cs typeface="Times New Roman" panose="02020603050405020304" pitchFamily="18" charset="0"/>
-            </a:endParaRPr>
           </a:p>
         </p:txBody>
       </p:sp>
@@ -7199,16 +7084,12 @@
           <a:lstStyle/>
           <a:p>
             <a:r>
-              <a:rPr lang="ru-RU" dirty="0" smtClean="0">
+              <a:rPr lang="ru-RU" dirty="0">
                 <a:latin typeface="Times New Roman" panose="02020603050405020304" pitchFamily="18" charset="0"/>
                 <a:cs typeface="Times New Roman" panose="02020603050405020304" pitchFamily="18" charset="0"/>
               </a:rPr>
               <a:t>Важные факторы</a:t>
             </a:r>
-            <a:endParaRPr lang="ru-RU" dirty="0">
-              <a:latin typeface="Times New Roman" panose="02020603050405020304" pitchFamily="18" charset="0"/>
-              <a:cs typeface="Times New Roman" panose="02020603050405020304" pitchFamily="18" charset="0"/>
-            </a:endParaRPr>
           </a:p>
         </p:txBody>
       </p:sp>
@@ -7336,13 +7217,6 @@
   <p:clrMapOvr>
     <a:masterClrMapping/>
   </p:clrMapOvr>
-  <p:timing>
-    <p:tnLst>
-      <p:par>
-        <p:cTn id="1" dur="indefinite" restart="never" nodeType="tmRoot"/>
-      </p:par>
-    </p:tnLst>
-  </p:timing>
 </p:sld>
 </file>
 
@@ -7399,8 +7273,8 @@
         </p:nvSpPr>
         <p:spPr>
           <a:xfrm>
-            <a:off x="6296746" y="1275606"/>
-            <a:ext cx="2520280" cy="3737610"/>
+            <a:off x="6245021" y="1246336"/>
+            <a:ext cx="2555503" cy="3737610"/>
           </a:xfrm>
         </p:spPr>
         <p:txBody>
@@ -7470,65 +7344,6 @@
               </a:rPr>
               <a:t> </a:t>
             </a:r>
-            <a:r>
-              <a:rPr lang="ru-RU" dirty="0" smtClean="0">
-                <a:solidFill>
-                  <a:schemeClr val="tx2"/>
-                </a:solidFill>
-                <a:latin typeface="Times New Roman" panose="02020603050405020304" pitchFamily="18" charset="0"/>
-                <a:cs typeface="Times New Roman" panose="02020603050405020304" pitchFamily="18" charset="0"/>
-              </a:rPr>
-              <a:t/>
-            </a:r>
-            <a:br>
-              <a:rPr lang="ru-RU" dirty="0" smtClean="0">
-                <a:solidFill>
-                  <a:schemeClr val="tx2"/>
-                </a:solidFill>
-                <a:latin typeface="Times New Roman" panose="02020603050405020304" pitchFamily="18" charset="0"/>
-                <a:cs typeface="Times New Roman" panose="02020603050405020304" pitchFamily="18" charset="0"/>
-              </a:rPr>
-            </a:br>
-            <a:r>
-              <a:rPr lang="ru-RU" dirty="0" err="1" smtClean="0">
-                <a:solidFill>
-                  <a:schemeClr val="tx2"/>
-                </a:solidFill>
-                <a:latin typeface="Times New Roman" panose="02020603050405020304" pitchFamily="18" charset="0"/>
-                <a:cs typeface="Times New Roman" panose="02020603050405020304" pitchFamily="18" charset="0"/>
-              </a:rPr>
-              <a:t>Adoption</a:t>
-            </a:r>
-            <a:r>
-              <a:rPr lang="ru-RU" dirty="0" smtClean="0">
-                <a:solidFill>
-                  <a:schemeClr val="tx2"/>
-                </a:solidFill>
-                <a:latin typeface="Times New Roman" panose="02020603050405020304" pitchFamily="18" charset="0"/>
-                <a:cs typeface="Times New Roman" panose="02020603050405020304" pitchFamily="18" charset="0"/>
-              </a:rPr>
-              <a:t> </a:t>
-            </a:r>
-            <a:r>
-              <a:rPr lang="ru-RU" dirty="0" err="1">
-                <a:solidFill>
-                  <a:schemeClr val="tx2"/>
-                </a:solidFill>
-                <a:latin typeface="Times New Roman" panose="02020603050405020304" pitchFamily="18" charset="0"/>
-                <a:cs typeface="Times New Roman" panose="02020603050405020304" pitchFamily="18" charset="0"/>
-              </a:rPr>
-              <a:t>Prediction</a:t>
-            </a:r>
-            <a:r>
-              <a:rPr lang="ru-RU" dirty="0">
-                <a:solidFill>
-                  <a:schemeClr val="tx2"/>
-                </a:solidFill>
-                <a:latin typeface="Times New Roman" panose="02020603050405020304" pitchFamily="18" charset="0"/>
-                <a:cs typeface="Times New Roman" panose="02020603050405020304" pitchFamily="18" charset="0"/>
-              </a:rPr>
-              <a:t>)</a:t>
-            </a:r>
             <a:br>
               <a:rPr lang="ru-RU" dirty="0">
                 <a:solidFill>
@@ -7539,34 +7354,14 @@
               </a:rPr>
             </a:br>
             <a:r>
-              <a:rPr lang="ru-RU" sz="1400" b="1" dirty="0">
-                <a:solidFill>
-                  <a:schemeClr val="tx2"/>
-                </a:solidFill>
-                <a:latin typeface="Times New Roman" panose="02020603050405020304" pitchFamily="18" charset="0"/>
-                <a:cs typeface="Times New Roman" panose="02020603050405020304" pitchFamily="18" charset="0"/>
-              </a:rPr>
-              <a:t>Объём:</a:t>
-            </a:r>
-            <a:r>
-              <a:rPr lang="ru-RU" sz="1400" dirty="0">
-                <a:solidFill>
-                  <a:schemeClr val="tx2"/>
-                </a:solidFill>
-                <a:latin typeface="Times New Roman" panose="02020603050405020304" pitchFamily="18" charset="0"/>
-                <a:cs typeface="Times New Roman" panose="02020603050405020304" pitchFamily="18" charset="0"/>
-              </a:rPr>
-              <a:t> </a:t>
-            </a:r>
-            <a:r>
-              <a:rPr lang="ru-RU" dirty="0" smtClean="0">
-                <a:solidFill>
-                  <a:schemeClr val="tx2"/>
-                </a:solidFill>
-                <a:latin typeface="Times New Roman" panose="02020603050405020304" pitchFamily="18" charset="0"/>
-                <a:cs typeface="Times New Roman" panose="02020603050405020304" pitchFamily="18" charset="0"/>
-              </a:rPr>
-              <a:t>около 15 </a:t>
+              <a:rPr lang="ru-RU" dirty="0" err="1">
+                <a:solidFill>
+                  <a:schemeClr val="tx2"/>
+                </a:solidFill>
+                <a:latin typeface="Times New Roman" panose="02020603050405020304" pitchFamily="18" charset="0"/>
+                <a:cs typeface="Times New Roman" panose="02020603050405020304" pitchFamily="18" charset="0"/>
+              </a:rPr>
+              <a:t>Adoption</a:t>
             </a:r>
             <a:r>
               <a:rPr lang="ru-RU" dirty="0">
@@ -7576,7 +7371,27 @@
                 <a:latin typeface="Times New Roman" panose="02020603050405020304" pitchFamily="18" charset="0"/>
                 <a:cs typeface="Times New Roman" panose="02020603050405020304" pitchFamily="18" charset="0"/>
               </a:rPr>
-              <a:t>000 записей о кошках из приютов.</a:t>
+              <a:t> </a:t>
+            </a:r>
+            <a:r>
+              <a:rPr lang="ru-RU" dirty="0" err="1">
+                <a:solidFill>
+                  <a:schemeClr val="tx2"/>
+                </a:solidFill>
+                <a:latin typeface="Times New Roman" panose="02020603050405020304" pitchFamily="18" charset="0"/>
+                <a:cs typeface="Times New Roman" panose="02020603050405020304" pitchFamily="18" charset="0"/>
+              </a:rPr>
+              <a:t>Prediction</a:t>
+            </a:r>
+            <a:r>
+              <a:rPr lang="ru-RU" dirty="0">
+                <a:solidFill>
+                  <a:schemeClr val="tx2"/>
+                </a:solidFill>
+                <a:latin typeface="Times New Roman" panose="02020603050405020304" pitchFamily="18" charset="0"/>
+                <a:cs typeface="Times New Roman" panose="02020603050405020304" pitchFamily="18" charset="0"/>
+              </a:rPr>
+              <a:t>)</a:t>
             </a:r>
             <a:br>
               <a:rPr lang="ru-RU" dirty="0">
@@ -7587,6 +7402,15 @@
                 <a:cs typeface="Times New Roman" panose="02020603050405020304" pitchFamily="18" charset="0"/>
               </a:rPr>
             </a:br>
+            <a:br>
+              <a:rPr lang="ru-RU" dirty="0">
+                <a:solidFill>
+                  <a:schemeClr val="tx2"/>
+                </a:solidFill>
+                <a:latin typeface="Times New Roman" panose="02020603050405020304" pitchFamily="18" charset="0"/>
+                <a:cs typeface="Times New Roman" panose="02020603050405020304" pitchFamily="18" charset="0"/>
+              </a:rPr>
+            </a:br>
             <a:r>
               <a:rPr lang="ru-RU" sz="1400" b="1" dirty="0">
                 <a:solidFill>
@@ -7595,17 +7419,7 @@
                 <a:latin typeface="Times New Roman" panose="02020603050405020304" pitchFamily="18" charset="0"/>
                 <a:cs typeface="Times New Roman" panose="02020603050405020304" pitchFamily="18" charset="0"/>
               </a:rPr>
-              <a:t>Ключевые </a:t>
-            </a:r>
-            <a:r>
-              <a:rPr lang="ru-RU" sz="1400" b="1" dirty="0" smtClean="0">
-                <a:solidFill>
-                  <a:schemeClr val="tx2"/>
-                </a:solidFill>
-                <a:latin typeface="Times New Roman" panose="02020603050405020304" pitchFamily="18" charset="0"/>
-                <a:cs typeface="Times New Roman" panose="02020603050405020304" pitchFamily="18" charset="0"/>
-              </a:rPr>
-              <a:t>поля:</a:t>
+              <a:t>Объём:</a:t>
             </a:r>
             <a:r>
               <a:rPr lang="ru-RU" sz="1400" dirty="0">
@@ -7615,7 +7429,45 @@
                 <a:latin typeface="Times New Roman" panose="02020603050405020304" pitchFamily="18" charset="0"/>
                 <a:cs typeface="Times New Roman" panose="02020603050405020304" pitchFamily="18" charset="0"/>
               </a:rPr>
-              <a:t/>
+              <a:t> </a:t>
+            </a:r>
+            <a:r>
+              <a:rPr lang="ru-RU" dirty="0">
+                <a:solidFill>
+                  <a:schemeClr val="tx2"/>
+                </a:solidFill>
+                <a:latin typeface="Times New Roman" panose="02020603050405020304" pitchFamily="18" charset="0"/>
+                <a:cs typeface="Times New Roman" panose="02020603050405020304" pitchFamily="18" charset="0"/>
+              </a:rPr>
+              <a:t>около 15 000 записей о кошках из приютов.</a:t>
+            </a:r>
+            <a:br>
+              <a:rPr lang="ru-RU" dirty="0">
+                <a:solidFill>
+                  <a:schemeClr val="tx2"/>
+                </a:solidFill>
+                <a:latin typeface="Times New Roman" panose="02020603050405020304" pitchFamily="18" charset="0"/>
+                <a:cs typeface="Times New Roman" panose="02020603050405020304" pitchFamily="18" charset="0"/>
+              </a:rPr>
+            </a:br>
+            <a:br>
+              <a:rPr lang="ru-RU" dirty="0">
+                <a:solidFill>
+                  <a:schemeClr val="tx2"/>
+                </a:solidFill>
+                <a:latin typeface="Times New Roman" panose="02020603050405020304" pitchFamily="18" charset="0"/>
+                <a:cs typeface="Times New Roman" panose="02020603050405020304" pitchFamily="18" charset="0"/>
+              </a:rPr>
+            </a:br>
+            <a:r>
+              <a:rPr lang="ru-RU" sz="1400" b="1" dirty="0">
+                <a:solidFill>
+                  <a:schemeClr val="tx2"/>
+                </a:solidFill>
+                <a:latin typeface="Times New Roman" panose="02020603050405020304" pitchFamily="18" charset="0"/>
+                <a:cs typeface="Times New Roman" panose="02020603050405020304" pitchFamily="18" charset="0"/>
+              </a:rPr>
+              <a:t>Ключевые поля для проекта:</a:t>
             </a:r>
             <a:br>
               <a:rPr lang="ru-RU" sz="1400" dirty="0">
@@ -7627,16 +7479,6 @@
               </a:rPr>
             </a:br>
             <a:r>
-              <a:rPr lang="ru-RU" dirty="0" smtClean="0">
-                <a:solidFill>
-                  <a:schemeClr val="tx2"/>
-                </a:solidFill>
-                <a:latin typeface="Times New Roman" panose="02020603050405020304" pitchFamily="18" charset="0"/>
-                <a:cs typeface="Times New Roman" panose="02020603050405020304" pitchFamily="18" charset="0"/>
-              </a:rPr>
-              <a:t>Возраст </a:t>
-            </a:r>
-            <a:r>
               <a:rPr lang="ru-RU" dirty="0">
                 <a:solidFill>
                   <a:schemeClr val="tx2"/>
@@ -7644,10 +7486,10 @@
                 <a:latin typeface="Times New Roman" panose="02020603050405020304" pitchFamily="18" charset="0"/>
                 <a:cs typeface="Times New Roman" panose="02020603050405020304" pitchFamily="18" charset="0"/>
               </a:rPr>
-              <a:t>(</a:t>
-            </a:r>
-            <a:r>
-              <a:rPr lang="ru-RU" dirty="0" err="1" smtClean="0">
+              <a:t>Возраст (</a:t>
+            </a:r>
+            <a:r>
+              <a:rPr lang="ru-RU" dirty="0" err="1">
                 <a:solidFill>
                   <a:schemeClr val="tx2"/>
                 </a:solidFill>
@@ -7657,7 +7499,7 @@
               <a:t>Age</a:t>
             </a:r>
             <a:r>
-              <a:rPr lang="ru-RU" dirty="0" smtClean="0">
+              <a:rPr lang="ru-RU" dirty="0">
                 <a:solidFill>
                   <a:schemeClr val="tx2"/>
                 </a:solidFill>
@@ -7665,232 +7507,6 @@
                 <a:cs typeface="Times New Roman" panose="02020603050405020304" pitchFamily="18" charset="0"/>
               </a:rPr>
               <a:t>)</a:t>
-            </a:r>
-            <a:br>
-              <a:rPr lang="ru-RU" dirty="0" smtClean="0">
-                <a:solidFill>
-                  <a:schemeClr val="tx2"/>
-                </a:solidFill>
-                <a:latin typeface="Times New Roman" panose="02020603050405020304" pitchFamily="18" charset="0"/>
-                <a:cs typeface="Times New Roman" panose="02020603050405020304" pitchFamily="18" charset="0"/>
-              </a:rPr>
-            </a:br>
-            <a:r>
-              <a:rPr lang="ru-RU" dirty="0" smtClean="0">
-                <a:solidFill>
-                  <a:schemeClr val="tx2"/>
-                </a:solidFill>
-                <a:latin typeface="Times New Roman" panose="02020603050405020304" pitchFamily="18" charset="0"/>
-                <a:cs typeface="Times New Roman" panose="02020603050405020304" pitchFamily="18" charset="0"/>
-              </a:rPr>
-              <a:t>Порода </a:t>
-            </a:r>
-            <a:r>
-              <a:rPr lang="ru-RU" dirty="0">
-                <a:solidFill>
-                  <a:schemeClr val="tx2"/>
-                </a:solidFill>
-                <a:latin typeface="Times New Roman" panose="02020603050405020304" pitchFamily="18" charset="0"/>
-                <a:cs typeface="Times New Roman" panose="02020603050405020304" pitchFamily="18" charset="0"/>
-              </a:rPr>
-              <a:t>(</a:t>
-            </a:r>
-            <a:r>
-              <a:rPr lang="ru-RU" dirty="0" err="1" smtClean="0">
-                <a:solidFill>
-                  <a:schemeClr val="tx2"/>
-                </a:solidFill>
-                <a:latin typeface="Times New Roman" panose="02020603050405020304" pitchFamily="18" charset="0"/>
-                <a:cs typeface="Times New Roman" panose="02020603050405020304" pitchFamily="18" charset="0"/>
-              </a:rPr>
-              <a:t>Breed</a:t>
-            </a:r>
-            <a:r>
-              <a:rPr lang="ru-RU" dirty="0" smtClean="0">
-                <a:solidFill>
-                  <a:schemeClr val="tx2"/>
-                </a:solidFill>
-                <a:latin typeface="Times New Roman" panose="02020603050405020304" pitchFamily="18" charset="0"/>
-                <a:cs typeface="Times New Roman" panose="02020603050405020304" pitchFamily="18" charset="0"/>
-              </a:rPr>
-              <a:t>)</a:t>
-            </a:r>
-            <a:br>
-              <a:rPr lang="ru-RU" dirty="0" smtClean="0">
-                <a:solidFill>
-                  <a:schemeClr val="tx2"/>
-                </a:solidFill>
-                <a:latin typeface="Times New Roman" panose="02020603050405020304" pitchFamily="18" charset="0"/>
-                <a:cs typeface="Times New Roman" panose="02020603050405020304" pitchFamily="18" charset="0"/>
-              </a:rPr>
-            </a:br>
-            <a:r>
-              <a:rPr lang="ru-RU" dirty="0" smtClean="0">
-                <a:solidFill>
-                  <a:schemeClr val="tx2"/>
-                </a:solidFill>
-                <a:latin typeface="Times New Roman" panose="02020603050405020304" pitchFamily="18" charset="0"/>
-                <a:cs typeface="Times New Roman" panose="02020603050405020304" pitchFamily="18" charset="0"/>
-              </a:rPr>
-              <a:t>Количество </a:t>
-            </a:r>
-            <a:r>
-              <a:rPr lang="ru-RU" dirty="0">
-                <a:solidFill>
-                  <a:schemeClr val="tx2"/>
-                </a:solidFill>
-                <a:latin typeface="Times New Roman" panose="02020603050405020304" pitchFamily="18" charset="0"/>
-                <a:cs typeface="Times New Roman" panose="02020603050405020304" pitchFamily="18" charset="0"/>
-              </a:rPr>
-              <a:t>фотографий (</a:t>
-            </a:r>
-            <a:r>
-              <a:rPr lang="ru-RU" dirty="0" err="1" smtClean="0">
-                <a:solidFill>
-                  <a:schemeClr val="tx2"/>
-                </a:solidFill>
-                <a:latin typeface="Times New Roman" panose="02020603050405020304" pitchFamily="18" charset="0"/>
-                <a:cs typeface="Times New Roman" panose="02020603050405020304" pitchFamily="18" charset="0"/>
-              </a:rPr>
-              <a:t>PhotoAmt</a:t>
-            </a:r>
-            <a:r>
-              <a:rPr lang="ru-RU" dirty="0" smtClean="0">
-                <a:solidFill>
-                  <a:schemeClr val="tx2"/>
-                </a:solidFill>
-                <a:latin typeface="Times New Roman" panose="02020603050405020304" pitchFamily="18" charset="0"/>
-                <a:cs typeface="Times New Roman" panose="02020603050405020304" pitchFamily="18" charset="0"/>
-              </a:rPr>
-              <a:t>)</a:t>
-            </a:r>
-            <a:br>
-              <a:rPr lang="ru-RU" dirty="0" smtClean="0">
-                <a:solidFill>
-                  <a:schemeClr val="tx2"/>
-                </a:solidFill>
-                <a:latin typeface="Times New Roman" panose="02020603050405020304" pitchFamily="18" charset="0"/>
-                <a:cs typeface="Times New Roman" panose="02020603050405020304" pitchFamily="18" charset="0"/>
-              </a:rPr>
-            </a:br>
-            <a:r>
-              <a:rPr lang="ru-RU" dirty="0" smtClean="0">
-                <a:solidFill>
-                  <a:schemeClr val="tx2"/>
-                </a:solidFill>
-                <a:latin typeface="Times New Roman" panose="02020603050405020304" pitchFamily="18" charset="0"/>
-                <a:cs typeface="Times New Roman" panose="02020603050405020304" pitchFamily="18" charset="0"/>
-              </a:rPr>
-              <a:t>Статус </a:t>
-            </a:r>
-            <a:r>
-              <a:rPr lang="ru-RU" dirty="0">
-                <a:solidFill>
-                  <a:schemeClr val="tx2"/>
-                </a:solidFill>
-                <a:latin typeface="Times New Roman" panose="02020603050405020304" pitchFamily="18" charset="0"/>
-                <a:cs typeface="Times New Roman" panose="02020603050405020304" pitchFamily="18" charset="0"/>
-              </a:rPr>
-              <a:t>стерилизации (</a:t>
-            </a:r>
-            <a:r>
-              <a:rPr lang="ru-RU" dirty="0" err="1" smtClean="0">
-                <a:solidFill>
-                  <a:schemeClr val="tx2"/>
-                </a:solidFill>
-                <a:latin typeface="Times New Roman" panose="02020603050405020304" pitchFamily="18" charset="0"/>
-                <a:cs typeface="Times New Roman" panose="02020603050405020304" pitchFamily="18" charset="0"/>
-              </a:rPr>
-              <a:t>Sterilization</a:t>
-            </a:r>
-            <a:r>
-              <a:rPr lang="ru-RU" dirty="0" smtClean="0">
-                <a:solidFill>
-                  <a:schemeClr val="tx2"/>
-                </a:solidFill>
-                <a:latin typeface="Times New Roman" panose="02020603050405020304" pitchFamily="18" charset="0"/>
-                <a:cs typeface="Times New Roman" panose="02020603050405020304" pitchFamily="18" charset="0"/>
-              </a:rPr>
-              <a:t>)</a:t>
-            </a:r>
-            <a:br>
-              <a:rPr lang="ru-RU" dirty="0" smtClean="0">
-                <a:solidFill>
-                  <a:schemeClr val="tx2"/>
-                </a:solidFill>
-                <a:latin typeface="Times New Roman" panose="02020603050405020304" pitchFamily="18" charset="0"/>
-                <a:cs typeface="Times New Roman" panose="02020603050405020304" pitchFamily="18" charset="0"/>
-              </a:rPr>
-            </a:br>
-            <a:r>
-              <a:rPr lang="ru-RU" dirty="0" smtClean="0">
-                <a:solidFill>
-                  <a:schemeClr val="tx2"/>
-                </a:solidFill>
-                <a:latin typeface="Times New Roman" panose="02020603050405020304" pitchFamily="18" charset="0"/>
-                <a:cs typeface="Times New Roman" panose="02020603050405020304" pitchFamily="18" charset="0"/>
-              </a:rPr>
-              <a:t>Скорость </a:t>
-            </a:r>
-            <a:r>
-              <a:rPr lang="ru-RU" dirty="0">
-                <a:solidFill>
-                  <a:schemeClr val="tx2"/>
-                </a:solidFill>
-                <a:latin typeface="Times New Roman" panose="02020603050405020304" pitchFamily="18" charset="0"/>
-                <a:cs typeface="Times New Roman" panose="02020603050405020304" pitchFamily="18" charset="0"/>
-              </a:rPr>
-              <a:t>усыновления (</a:t>
-            </a:r>
-            <a:r>
-              <a:rPr lang="ru-RU" dirty="0" err="1">
-                <a:solidFill>
-                  <a:schemeClr val="tx2"/>
-                </a:solidFill>
-                <a:latin typeface="Times New Roman" panose="02020603050405020304" pitchFamily="18" charset="0"/>
-                <a:cs typeface="Times New Roman" panose="02020603050405020304" pitchFamily="18" charset="0"/>
-              </a:rPr>
-              <a:t>AdoptionSpeed</a:t>
-            </a:r>
-            <a:r>
-              <a:rPr lang="ru-RU" dirty="0" smtClean="0">
-                <a:solidFill>
-                  <a:schemeClr val="tx2"/>
-                </a:solidFill>
-                <a:latin typeface="Times New Roman" panose="02020603050405020304" pitchFamily="18" charset="0"/>
-                <a:cs typeface="Times New Roman" panose="02020603050405020304" pitchFamily="18" charset="0"/>
-              </a:rPr>
-              <a:t>) - </a:t>
-            </a:r>
-            <a:r>
-              <a:rPr lang="ru-RU" dirty="0">
-                <a:solidFill>
-                  <a:schemeClr val="tx2"/>
-                </a:solidFill>
-                <a:latin typeface="Times New Roman" panose="02020603050405020304" pitchFamily="18" charset="0"/>
-                <a:cs typeface="Times New Roman" panose="02020603050405020304" pitchFamily="18" charset="0"/>
-              </a:rPr>
-              <a:t>целевая переменная (от 0 </a:t>
-            </a:r>
-            <a:r>
-              <a:rPr lang="ru-RU" dirty="0" smtClean="0">
-                <a:solidFill>
-                  <a:schemeClr val="tx2"/>
-                </a:solidFill>
-                <a:latin typeface="Times New Roman" panose="02020603050405020304" pitchFamily="18" charset="0"/>
-                <a:cs typeface="Times New Roman" panose="02020603050405020304" pitchFamily="18" charset="0"/>
-              </a:rPr>
-              <a:t>- </a:t>
-            </a:r>
-            <a:r>
-              <a:rPr lang="ru-RU" dirty="0">
-                <a:solidFill>
-                  <a:schemeClr val="tx2"/>
-                </a:solidFill>
-                <a:latin typeface="Times New Roman" panose="02020603050405020304" pitchFamily="18" charset="0"/>
-                <a:cs typeface="Times New Roman" panose="02020603050405020304" pitchFamily="18" charset="0"/>
-              </a:rPr>
-              <a:t>«забрали в день публикации» до </a:t>
             </a:r>
             <a:br>
               <a:rPr lang="ru-RU" dirty="0">
@@ -7902,16 +7518,6 @@
               </a:rPr>
             </a:br>
             <a:r>
-              <a:rPr lang="ru-RU" dirty="0" smtClean="0">
-                <a:solidFill>
-                  <a:schemeClr val="tx2"/>
-                </a:solidFill>
-                <a:latin typeface="Times New Roman" panose="02020603050405020304" pitchFamily="18" charset="0"/>
-                <a:cs typeface="Times New Roman" panose="02020603050405020304" pitchFamily="18" charset="0"/>
-              </a:rPr>
-              <a:t>4 </a:t>
-            </a:r>
-            <a:r>
               <a:rPr lang="ru-RU" dirty="0">
                 <a:solidFill>
                   <a:schemeClr val="tx2"/>
@@ -7919,17 +7525,17 @@
                 <a:latin typeface="Times New Roman" panose="02020603050405020304" pitchFamily="18" charset="0"/>
                 <a:cs typeface="Times New Roman" panose="02020603050405020304" pitchFamily="18" charset="0"/>
               </a:rPr>
-              <a:t>-</a:t>
-            </a:r>
-            <a:r>
-              <a:rPr lang="ru-RU" dirty="0" smtClean="0">
-                <a:solidFill>
-                  <a:schemeClr val="tx2"/>
-                </a:solidFill>
-                <a:latin typeface="Times New Roman" panose="02020603050405020304" pitchFamily="18" charset="0"/>
-                <a:cs typeface="Times New Roman" panose="02020603050405020304" pitchFamily="18" charset="0"/>
-              </a:rPr>
-              <a:t> </a:t>
+              <a:t>Количество фотографий (</a:t>
+            </a:r>
+            <a:r>
+              <a:rPr lang="ru-RU" dirty="0" err="1">
+                <a:solidFill>
+                  <a:schemeClr val="tx2"/>
+                </a:solidFill>
+                <a:latin typeface="Times New Roman" panose="02020603050405020304" pitchFamily="18" charset="0"/>
+                <a:cs typeface="Times New Roman" panose="02020603050405020304" pitchFamily="18" charset="0"/>
+              </a:rPr>
+              <a:t>PhotoAmt</a:t>
             </a:r>
             <a:r>
               <a:rPr lang="ru-RU" dirty="0">
@@ -7939,7 +7545,163 @@
                 <a:latin typeface="Times New Roman" panose="02020603050405020304" pitchFamily="18" charset="0"/>
                 <a:cs typeface="Times New Roman" panose="02020603050405020304" pitchFamily="18" charset="0"/>
               </a:rPr>
-              <a:t>«не усыновлён»).</a:t>
+              <a:t>)</a:t>
+            </a:r>
+            <a:br>
+              <a:rPr lang="ru-RU" dirty="0">
+                <a:solidFill>
+                  <a:schemeClr val="tx2"/>
+                </a:solidFill>
+                <a:latin typeface="Times New Roman" panose="02020603050405020304" pitchFamily="18" charset="0"/>
+                <a:cs typeface="Times New Roman" panose="02020603050405020304" pitchFamily="18" charset="0"/>
+              </a:rPr>
+            </a:br>
+            <a:r>
+              <a:rPr lang="ru-RU" dirty="0">
+                <a:solidFill>
+                  <a:schemeClr val="tx2"/>
+                </a:solidFill>
+                <a:latin typeface="Times New Roman" panose="02020603050405020304" pitchFamily="18" charset="0"/>
+                <a:cs typeface="Times New Roman" panose="02020603050405020304" pitchFamily="18" charset="0"/>
+              </a:rPr>
+              <a:t>Статус стерилизации (</a:t>
+            </a:r>
+            <a:r>
+              <a:rPr lang="ru-RU" dirty="0" err="1">
+                <a:solidFill>
+                  <a:schemeClr val="tx2"/>
+                </a:solidFill>
+                <a:latin typeface="Times New Roman" panose="02020603050405020304" pitchFamily="18" charset="0"/>
+                <a:cs typeface="Times New Roman" panose="02020603050405020304" pitchFamily="18" charset="0"/>
+              </a:rPr>
+              <a:t>Sterilization</a:t>
+            </a:r>
+            <a:r>
+              <a:rPr lang="ru-RU" dirty="0">
+                <a:solidFill>
+                  <a:schemeClr val="tx2"/>
+                </a:solidFill>
+                <a:latin typeface="Times New Roman" panose="02020603050405020304" pitchFamily="18" charset="0"/>
+                <a:cs typeface="Times New Roman" panose="02020603050405020304" pitchFamily="18" charset="0"/>
+              </a:rPr>
+              <a:t>)</a:t>
+            </a:r>
+            <a:br>
+              <a:rPr lang="ru-RU" dirty="0">
+                <a:solidFill>
+                  <a:schemeClr val="tx2"/>
+                </a:solidFill>
+                <a:latin typeface="Times New Roman" panose="02020603050405020304" pitchFamily="18" charset="0"/>
+                <a:cs typeface="Times New Roman" panose="02020603050405020304" pitchFamily="18" charset="0"/>
+              </a:rPr>
+            </a:br>
+            <a:r>
+              <a:rPr lang="ru-RU" dirty="0">
+                <a:solidFill>
+                  <a:schemeClr val="tx2"/>
+                </a:solidFill>
+                <a:latin typeface="Times New Roman" panose="02020603050405020304" pitchFamily="18" charset="0"/>
+                <a:cs typeface="Times New Roman" panose="02020603050405020304" pitchFamily="18" charset="0"/>
+              </a:rPr>
+              <a:t>Размер (</a:t>
+            </a:r>
+            <a:r>
+              <a:rPr lang="ru-RU" dirty="0" err="1">
+                <a:solidFill>
+                  <a:schemeClr val="tx2"/>
+                </a:solidFill>
+                <a:latin typeface="Times New Roman" panose="02020603050405020304" pitchFamily="18" charset="0"/>
+                <a:cs typeface="Times New Roman" panose="02020603050405020304" pitchFamily="18" charset="0"/>
+              </a:rPr>
+              <a:t>MaturitySize</a:t>
+            </a:r>
+            <a:r>
+              <a:rPr lang="ru-RU" dirty="0">
+                <a:solidFill>
+                  <a:schemeClr val="tx2"/>
+                </a:solidFill>
+                <a:latin typeface="Times New Roman" panose="02020603050405020304" pitchFamily="18" charset="0"/>
+                <a:cs typeface="Times New Roman" panose="02020603050405020304" pitchFamily="18" charset="0"/>
+              </a:rPr>
+              <a:t>) – размер животного во взрослом возрасте</a:t>
+            </a:r>
+            <a:br>
+              <a:rPr lang="ru-RU" dirty="0">
+                <a:solidFill>
+                  <a:schemeClr val="tx2"/>
+                </a:solidFill>
+                <a:latin typeface="Times New Roman" panose="02020603050405020304" pitchFamily="18" charset="0"/>
+                <a:cs typeface="Times New Roman" panose="02020603050405020304" pitchFamily="18" charset="0"/>
+              </a:rPr>
+            </a:br>
+            <a:r>
+              <a:rPr lang="ru-RU" dirty="0">
+                <a:solidFill>
+                  <a:schemeClr val="tx2"/>
+                </a:solidFill>
+                <a:latin typeface="Times New Roman" panose="02020603050405020304" pitchFamily="18" charset="0"/>
+                <a:cs typeface="Times New Roman" panose="02020603050405020304" pitchFamily="18" charset="0"/>
+              </a:rPr>
+              <a:t>Длина шерсти (</a:t>
+            </a:r>
+            <a:r>
+              <a:rPr lang="ru-RU" dirty="0" err="1">
+                <a:solidFill>
+                  <a:schemeClr val="tx2"/>
+                </a:solidFill>
+                <a:latin typeface="Times New Roman" panose="02020603050405020304" pitchFamily="18" charset="0"/>
+                <a:cs typeface="Times New Roman" panose="02020603050405020304" pitchFamily="18" charset="0"/>
+              </a:rPr>
+              <a:t>FurLength</a:t>
+            </a:r>
+            <a:r>
+              <a:rPr lang="ru-RU" dirty="0">
+                <a:solidFill>
+                  <a:schemeClr val="tx2"/>
+                </a:solidFill>
+                <a:latin typeface="Times New Roman" panose="02020603050405020304" pitchFamily="18" charset="0"/>
+                <a:cs typeface="Times New Roman" panose="02020603050405020304" pitchFamily="18" charset="0"/>
+              </a:rPr>
+              <a:t>)</a:t>
+            </a:r>
+            <a:br>
+              <a:rPr lang="ru-RU" dirty="0">
+                <a:solidFill>
+                  <a:schemeClr val="tx2"/>
+                </a:solidFill>
+                <a:latin typeface="Times New Roman" panose="02020603050405020304" pitchFamily="18" charset="0"/>
+                <a:cs typeface="Times New Roman" panose="02020603050405020304" pitchFamily="18" charset="0"/>
+              </a:rPr>
+            </a:br>
+            <a:r>
+              <a:rPr lang="ru-RU" dirty="0">
+                <a:solidFill>
+                  <a:schemeClr val="tx2"/>
+                </a:solidFill>
+                <a:latin typeface="Times New Roman" panose="02020603050405020304" pitchFamily="18" charset="0"/>
+                <a:cs typeface="Times New Roman" panose="02020603050405020304" pitchFamily="18" charset="0"/>
+              </a:rPr>
+              <a:t>Состояние здоровья (</a:t>
+            </a:r>
+            <a:r>
+              <a:rPr lang="ru-RU" dirty="0" err="1">
+                <a:solidFill>
+                  <a:schemeClr val="tx2"/>
+                </a:solidFill>
+                <a:latin typeface="Times New Roman" panose="02020603050405020304" pitchFamily="18" charset="0"/>
+                <a:cs typeface="Times New Roman" panose="02020603050405020304" pitchFamily="18" charset="0"/>
+              </a:rPr>
+              <a:t>Health</a:t>
+            </a:r>
+            <a:r>
+              <a:rPr lang="ru-RU" dirty="0">
+                <a:solidFill>
+                  <a:schemeClr val="tx2"/>
+                </a:solidFill>
+                <a:latin typeface="Times New Roman" panose="02020603050405020304" pitchFamily="18" charset="0"/>
+                <a:cs typeface="Times New Roman" panose="02020603050405020304" pitchFamily="18" charset="0"/>
+              </a:rPr>
+              <a:t>)</a:t>
             </a:r>
           </a:p>
         </p:txBody>
@@ -7997,7 +7759,7 @@
               </a:rPr>
               <a:t>Информация </a:t>
             </a:r>
-            <a:endParaRPr lang="en-US" sz="2800" b="1" dirty="0" smtClean="0">
+            <a:endParaRPr lang="en-US" sz="2800" b="1" dirty="0">
               <a:solidFill>
                 <a:schemeClr val="tx2"/>
               </a:solidFill>
@@ -8007,7 +7769,7 @@
           </a:p>
           <a:p>
             <a:r>
-              <a:rPr lang="ru-RU" sz="2800" b="1" dirty="0" smtClean="0">
+              <a:rPr lang="ru-RU" sz="2800" b="1" dirty="0">
                 <a:solidFill>
                   <a:schemeClr val="tx2"/>
                 </a:solidFill>
@@ -8132,13 +7894,6 @@
   <p:clrMapOvr>
     <a:masterClrMapping/>
   </p:clrMapOvr>
-  <p:timing>
-    <p:tnLst>
-      <p:par>
-        <p:cTn id="1" dur="indefinite" restart="never" nodeType="tmRoot"/>
-      </p:par>
-    </p:tnLst>
-  </p:timing>
 </p:sld>
 </file>
 
@@ -8182,16 +7937,12 @@
           <a:lstStyle/>
           <a:p>
             <a:r>
-              <a:rPr lang="ru-RU" sz="2800" dirty="0" smtClean="0">
+              <a:rPr lang="ru-RU" sz="2800" dirty="0">
                 <a:latin typeface="Times New Roman" panose="02020603050405020304" pitchFamily="18" charset="0"/>
                 <a:cs typeface="Times New Roman" panose="02020603050405020304" pitchFamily="18" charset="0"/>
               </a:rPr>
               <a:t>Ход работы</a:t>
             </a:r>
-            <a:endParaRPr lang="ru-RU" sz="2800" dirty="0">
-              <a:latin typeface="Times New Roman" panose="02020603050405020304" pitchFamily="18" charset="0"/>
-              <a:cs typeface="Times New Roman" panose="02020603050405020304" pitchFamily="18" charset="0"/>
-            </a:endParaRPr>
           </a:p>
         </p:txBody>
       </p:sp>
@@ -8218,18 +7969,11 @@
           <a:lstStyle/>
           <a:p>
             <a:r>
-              <a:rPr lang="ru-RU" sz="1400" dirty="0" smtClean="0">
-                <a:latin typeface="Times New Roman" panose="02020603050405020304" pitchFamily="18" charset="0"/>
-                <a:cs typeface="Times New Roman" panose="02020603050405020304" pitchFamily="18" charset="0"/>
-              </a:rPr>
-              <a:t>1. Загрузка </a:t>
-            </a:r>
-            <a:r>
               <a:rPr lang="ru-RU" sz="1400" dirty="0">
                 <a:latin typeface="Times New Roman" panose="02020603050405020304" pitchFamily="18" charset="0"/>
                 <a:cs typeface="Times New Roman" panose="02020603050405020304" pitchFamily="18" charset="0"/>
               </a:rPr>
-              <a:t>данных</a:t>
+              <a:t>1. Загрузка данных</a:t>
             </a:r>
             <a:r>
               <a:rPr lang="ru-RU" sz="1400" b="0" dirty="0">
@@ -8281,34 +8025,199 @@
               <a:t> </a:t>
             </a:r>
             <a:r>
+              <a:rPr lang="en-US" sz="1400" b="0" dirty="0">
+                <a:latin typeface="Times New Roman" panose="02020603050405020304" pitchFamily="18" charset="0"/>
+                <a:cs typeface="Times New Roman" panose="02020603050405020304" pitchFamily="18" charset="0"/>
+              </a:rPr>
+              <a:t>Spark</a:t>
+            </a:r>
+            <a:r>
+              <a:rPr lang="ru-RU" sz="1400" b="0" dirty="0">
+                <a:latin typeface="Times New Roman" panose="02020603050405020304" pitchFamily="18" charset="0"/>
+                <a:cs typeface="Times New Roman" panose="02020603050405020304" pitchFamily="18" charset="0"/>
+              </a:rPr>
+              <a:t>.</a:t>
+            </a:r>
+          </a:p>
+          <a:p>
+            <a:r>
+              <a:rPr lang="ru-RU" sz="1400" dirty="0">
+                <a:latin typeface="Times New Roman" panose="02020603050405020304" pitchFamily="18" charset="0"/>
+                <a:cs typeface="Times New Roman" panose="02020603050405020304" pitchFamily="18" charset="0"/>
+              </a:rPr>
+              <a:t>2. ETL-обработка (</a:t>
+            </a:r>
+            <a:r>
+              <a:rPr lang="ru-RU" sz="1400" dirty="0" err="1">
+                <a:latin typeface="Times New Roman" panose="02020603050405020304" pitchFamily="18" charset="0"/>
+                <a:cs typeface="Times New Roman" panose="02020603050405020304" pitchFamily="18" charset="0"/>
+              </a:rPr>
+              <a:t>Spark</a:t>
+            </a:r>
+            <a:r>
+              <a:rPr lang="ru-RU" sz="1400" dirty="0">
+                <a:latin typeface="Times New Roman" panose="02020603050405020304" pitchFamily="18" charset="0"/>
+                <a:cs typeface="Times New Roman" panose="02020603050405020304" pitchFamily="18" charset="0"/>
+              </a:rPr>
+              <a:t>)</a:t>
+            </a:r>
+            <a:r>
+              <a:rPr lang="ru-RU" sz="1400" b="0" dirty="0">
+                <a:latin typeface="Times New Roman" panose="02020603050405020304" pitchFamily="18" charset="0"/>
+                <a:cs typeface="Times New Roman" panose="02020603050405020304" pitchFamily="18" charset="0"/>
+              </a:rPr>
+              <a:t> — удаление пустых строк и аномалий, добавление колонки </a:t>
+            </a:r>
+            <a:r>
               <a:rPr lang="ru-RU" sz="1400" b="0" dirty="0" err="1">
                 <a:latin typeface="Times New Roman" panose="02020603050405020304" pitchFamily="18" charset="0"/>
                 <a:cs typeface="Times New Roman" panose="02020603050405020304" pitchFamily="18" charset="0"/>
               </a:rPr>
-              <a:t>Flume</a:t>
+              <a:t>AgeGroup</a:t>
             </a:r>
             <a:r>
               <a:rPr lang="ru-RU" sz="1400" b="0" dirty="0">
                 <a:latin typeface="Times New Roman" panose="02020603050405020304" pitchFamily="18" charset="0"/>
                 <a:cs typeface="Times New Roman" panose="02020603050405020304" pitchFamily="18" charset="0"/>
               </a:rPr>
+              <a:t> (</a:t>
+            </a:r>
+            <a:r>
+              <a:rPr lang="ru-RU" sz="1400" b="0" dirty="0" err="1">
+                <a:latin typeface="Times New Roman" panose="02020603050405020304" pitchFamily="18" charset="0"/>
+                <a:cs typeface="Times New Roman" panose="02020603050405020304" pitchFamily="18" charset="0"/>
+              </a:rPr>
+              <a:t>Kitten</a:t>
+            </a:r>
+            <a:r>
+              <a:rPr lang="ru-RU" sz="1400" b="0" dirty="0">
+                <a:latin typeface="Times New Roman" panose="02020603050405020304" pitchFamily="18" charset="0"/>
+                <a:cs typeface="Times New Roman" panose="02020603050405020304" pitchFamily="18" charset="0"/>
+              </a:rPr>
+              <a:t> / </a:t>
+            </a:r>
+            <a:r>
+              <a:rPr lang="ru-RU" sz="1400" b="0" dirty="0" err="1">
+                <a:latin typeface="Times New Roman" panose="02020603050405020304" pitchFamily="18" charset="0"/>
+                <a:cs typeface="Times New Roman" panose="02020603050405020304" pitchFamily="18" charset="0"/>
+              </a:rPr>
+              <a:t>Adult</a:t>
+            </a:r>
+            <a:r>
+              <a:rPr lang="ru-RU" sz="1400" b="0" dirty="0">
+                <a:latin typeface="Times New Roman" panose="02020603050405020304" pitchFamily="18" charset="0"/>
+                <a:cs typeface="Times New Roman" panose="02020603050405020304" pitchFamily="18" charset="0"/>
+              </a:rPr>
+              <a:t> / </a:t>
+            </a:r>
+            <a:r>
+              <a:rPr lang="ru-RU" sz="1400" b="0" dirty="0" err="1">
+                <a:latin typeface="Times New Roman" panose="02020603050405020304" pitchFamily="18" charset="0"/>
+                <a:cs typeface="Times New Roman" panose="02020603050405020304" pitchFamily="18" charset="0"/>
+              </a:rPr>
+              <a:t>Senior</a:t>
+            </a:r>
+            <a:r>
+              <a:rPr lang="ru-RU" sz="1400" b="0" dirty="0">
+                <a:latin typeface="Times New Roman" panose="02020603050405020304" pitchFamily="18" charset="0"/>
+                <a:cs typeface="Times New Roman" panose="02020603050405020304" pitchFamily="18" charset="0"/>
+              </a:rPr>
+              <a:t>), приведение типов.</a:t>
+            </a:r>
+          </a:p>
+          <a:p>
+            <a:r>
+              <a:rPr lang="ru-RU" sz="1400" dirty="0">
+                <a:latin typeface="Times New Roman" panose="02020603050405020304" pitchFamily="18" charset="0"/>
+                <a:cs typeface="Times New Roman" panose="02020603050405020304" pitchFamily="18" charset="0"/>
+              </a:rPr>
+              <a:t>3. Кластеризация (</a:t>
+            </a:r>
+            <a:r>
+              <a:rPr lang="ru-RU" sz="1400" dirty="0" err="1">
+                <a:latin typeface="Times New Roman" panose="02020603050405020304" pitchFamily="18" charset="0"/>
+                <a:cs typeface="Times New Roman" panose="02020603050405020304" pitchFamily="18" charset="0"/>
+              </a:rPr>
+              <a:t>Spark</a:t>
+            </a:r>
+            <a:r>
+              <a:rPr lang="ru-RU" sz="1400" dirty="0">
+                <a:latin typeface="Times New Roman" panose="02020603050405020304" pitchFamily="18" charset="0"/>
+                <a:cs typeface="Times New Roman" panose="02020603050405020304" pitchFamily="18" charset="0"/>
+              </a:rPr>
+              <a:t> </a:t>
+            </a:r>
+            <a:r>
+              <a:rPr lang="ru-RU" sz="1400" dirty="0" err="1">
+                <a:latin typeface="Times New Roman" panose="02020603050405020304" pitchFamily="18" charset="0"/>
+                <a:cs typeface="Times New Roman" panose="02020603050405020304" pitchFamily="18" charset="0"/>
+              </a:rPr>
+              <a:t>MLlib</a:t>
+            </a:r>
+            <a:r>
+              <a:rPr lang="ru-RU" sz="1400" dirty="0">
+                <a:latin typeface="Times New Roman" panose="02020603050405020304" pitchFamily="18" charset="0"/>
+                <a:cs typeface="Times New Roman" panose="02020603050405020304" pitchFamily="18" charset="0"/>
+              </a:rPr>
+              <a:t>)</a:t>
+            </a:r>
+            <a:r>
+              <a:rPr lang="ru-RU" sz="1400" b="0" dirty="0">
+                <a:latin typeface="Times New Roman" panose="02020603050405020304" pitchFamily="18" charset="0"/>
+                <a:cs typeface="Times New Roman" panose="02020603050405020304" pitchFamily="18" charset="0"/>
+              </a:rPr>
+              <a:t> — все коты разделены на 5 кластеров алгоритмом </a:t>
+            </a:r>
+            <a:r>
+              <a:rPr lang="ru-RU" sz="1400" b="0" dirty="0" err="1">
+                <a:latin typeface="Times New Roman" panose="02020603050405020304" pitchFamily="18" charset="0"/>
+                <a:cs typeface="Times New Roman" panose="02020603050405020304" pitchFamily="18" charset="0"/>
+              </a:rPr>
+              <a:t>KMeans</a:t>
+            </a:r>
+            <a:r>
+              <a:rPr lang="ru-RU" sz="1400" b="0" dirty="0">
+                <a:latin typeface="Times New Roman" panose="02020603050405020304" pitchFamily="18" charset="0"/>
+                <a:cs typeface="Times New Roman" panose="02020603050405020304" pitchFamily="18" charset="0"/>
+              </a:rPr>
+              <a:t> по признакам (возраст, размер, шерсть, здоровье). Результат сохранён в </a:t>
+            </a:r>
+            <a:r>
+              <a:rPr lang="ru-RU" sz="1400" b="0" dirty="0" err="1">
+                <a:latin typeface="Times New Roman" panose="02020603050405020304" pitchFamily="18" charset="0"/>
+                <a:cs typeface="Times New Roman" panose="02020603050405020304" pitchFamily="18" charset="0"/>
+              </a:rPr>
+              <a:t>Hive</a:t>
+            </a:r>
+            <a:r>
+              <a:rPr lang="ru-RU" sz="1400" b="0" dirty="0">
+                <a:latin typeface="Times New Roman" panose="02020603050405020304" pitchFamily="18" charset="0"/>
+                <a:cs typeface="Times New Roman" panose="02020603050405020304" pitchFamily="18" charset="0"/>
+              </a:rPr>
+              <a:t>-таблицу </a:t>
+            </a:r>
+            <a:r>
+              <a:rPr lang="ru-RU" sz="1400" b="0" dirty="0" err="1">
+                <a:latin typeface="Times New Roman" panose="02020603050405020304" pitchFamily="18" charset="0"/>
+                <a:cs typeface="Times New Roman" panose="02020603050405020304" pitchFamily="18" charset="0"/>
+              </a:rPr>
+              <a:t>cats_clustered</a:t>
+            </a:r>
+            <a:r>
+              <a:rPr lang="ru-RU" sz="1400" b="0" dirty="0">
+                <a:latin typeface="Times New Roman" panose="02020603050405020304" pitchFamily="18" charset="0"/>
+                <a:cs typeface="Times New Roman" panose="02020603050405020304" pitchFamily="18" charset="0"/>
+              </a:rPr>
               <a:t>.</a:t>
             </a:r>
           </a:p>
           <a:p>
             <a:r>
-              <a:rPr lang="ru-RU" sz="1400" dirty="0" smtClean="0">
-                <a:latin typeface="Times New Roman" panose="02020603050405020304" pitchFamily="18" charset="0"/>
-                <a:cs typeface="Times New Roman" panose="02020603050405020304" pitchFamily="18" charset="0"/>
-              </a:rPr>
-              <a:t>2. ETL-обработка </a:t>
-            </a:r>
-            <a:r>
               <a:rPr lang="ru-RU" sz="1400" dirty="0">
                 <a:latin typeface="Times New Roman" panose="02020603050405020304" pitchFamily="18" charset="0"/>
                 <a:cs typeface="Times New Roman" panose="02020603050405020304" pitchFamily="18" charset="0"/>
               </a:rPr>
-              <a:t>(</a:t>
+              <a:t>4. Рекомендательная система (</a:t>
             </a:r>
             <a:r>
               <a:rPr lang="ru-RU" sz="1400" dirty="0" err="1">
@@ -8322,6 +8231,20 @@
                 <a:latin typeface="Times New Roman" panose="02020603050405020304" pitchFamily="18" charset="0"/>
                 <a:cs typeface="Times New Roman" panose="02020603050405020304" pitchFamily="18" charset="0"/>
               </a:rPr>
+              <a:t> </a:t>
+            </a:r>
+            <a:r>
+              <a:rPr lang="ru-RU" sz="1400" dirty="0" err="1">
+                <a:latin typeface="Times New Roman" panose="02020603050405020304" pitchFamily="18" charset="0"/>
+                <a:cs typeface="Times New Roman" panose="02020603050405020304" pitchFamily="18" charset="0"/>
+              </a:rPr>
+              <a:t>MLlib</a:t>
+            </a:r>
+            <a:r>
+              <a:rPr lang="ru-RU" sz="1400" dirty="0">
+                <a:latin typeface="Times New Roman" panose="02020603050405020304" pitchFamily="18" charset="0"/>
+                <a:cs typeface="Times New Roman" panose="02020603050405020304" pitchFamily="18" charset="0"/>
+              </a:rPr>
               <a:t>)</a:t>
             </a:r>
             <a:r>
@@ -8329,470 +8252,249 @@
                 <a:latin typeface="Times New Roman" panose="02020603050405020304" pitchFamily="18" charset="0"/>
                 <a:cs typeface="Times New Roman" panose="02020603050405020304" pitchFamily="18" charset="0"/>
               </a:rPr>
-              <a:t> — удаление пустых строк и аномалий, добавление колонки </a:t>
+              <a:t> — на основе кластеров сгенерированы синтетические взаимодействия, построена модель ALS, для каждого пользователя выдано </a:t>
+            </a:r>
+            <a:r>
+              <a:rPr lang="en-US" sz="1400" b="0" dirty="0">
+                <a:latin typeface="Times New Roman" panose="02020603050405020304" pitchFamily="18" charset="0"/>
+                <a:cs typeface="Times New Roman" panose="02020603050405020304" pitchFamily="18" charset="0"/>
+              </a:rPr>
+              <a:t>20</a:t>
+            </a:r>
+            <a:r>
+              <a:rPr lang="ru-RU" sz="1400" b="0" dirty="0">
+                <a:latin typeface="Times New Roman" panose="02020603050405020304" pitchFamily="18" charset="0"/>
+                <a:cs typeface="Times New Roman" panose="02020603050405020304" pitchFamily="18" charset="0"/>
+              </a:rPr>
+              <a:t> рекомендаций. Результат сохранён в </a:t>
             </a:r>
             <a:r>
               <a:rPr lang="ru-RU" sz="1400" b="0" dirty="0" err="1">
                 <a:latin typeface="Times New Roman" panose="02020603050405020304" pitchFamily="18" charset="0"/>
                 <a:cs typeface="Times New Roman" panose="02020603050405020304" pitchFamily="18" charset="0"/>
               </a:rPr>
-              <a:t>AgeGroup</a:t>
+              <a:t>cat_recommendations</a:t>
             </a:r>
             <a:r>
               <a:rPr lang="ru-RU" sz="1400" b="0" dirty="0">
                 <a:latin typeface="Times New Roman" panose="02020603050405020304" pitchFamily="18" charset="0"/>
                 <a:cs typeface="Times New Roman" panose="02020603050405020304" pitchFamily="18" charset="0"/>
               </a:rPr>
-              <a:t> (</a:t>
+              <a:t>.</a:t>
+            </a:r>
+          </a:p>
+          <a:p>
+            <a:r>
+              <a:rPr lang="ru-RU" sz="1400" dirty="0">
+                <a:latin typeface="Times New Roman" panose="02020603050405020304" pitchFamily="18" charset="0"/>
+                <a:cs typeface="Times New Roman" panose="02020603050405020304" pitchFamily="18" charset="0"/>
+              </a:rPr>
+              <a:t>5. Аналитический блок (</a:t>
+            </a:r>
+            <a:r>
+              <a:rPr lang="ru-RU" sz="1400" dirty="0" err="1">
+                <a:latin typeface="Times New Roman" panose="02020603050405020304" pitchFamily="18" charset="0"/>
+                <a:cs typeface="Times New Roman" panose="02020603050405020304" pitchFamily="18" charset="0"/>
+              </a:rPr>
+              <a:t>Hive</a:t>
+            </a:r>
+            <a:r>
+              <a:rPr lang="ru-RU" sz="1400" dirty="0">
+                <a:latin typeface="Times New Roman" panose="02020603050405020304" pitchFamily="18" charset="0"/>
+                <a:cs typeface="Times New Roman" panose="02020603050405020304" pitchFamily="18" charset="0"/>
+              </a:rPr>
+              <a:t> / </a:t>
+            </a:r>
+            <a:r>
+              <a:rPr lang="ru-RU" sz="1400" dirty="0" err="1">
+                <a:latin typeface="Times New Roman" panose="02020603050405020304" pitchFamily="18" charset="0"/>
+                <a:cs typeface="Times New Roman" panose="02020603050405020304" pitchFamily="18" charset="0"/>
+              </a:rPr>
+              <a:t>Spark</a:t>
+            </a:r>
+            <a:r>
+              <a:rPr lang="ru-RU" sz="1400" dirty="0">
+                <a:latin typeface="Times New Roman" panose="02020603050405020304" pitchFamily="18" charset="0"/>
+                <a:cs typeface="Times New Roman" panose="02020603050405020304" pitchFamily="18" charset="0"/>
+              </a:rPr>
+              <a:t> SQL)</a:t>
+            </a:r>
+            <a:r>
+              <a:rPr lang="ru-RU" sz="1400" b="0" dirty="0">
+                <a:latin typeface="Times New Roman" panose="02020603050405020304" pitchFamily="18" charset="0"/>
+                <a:cs typeface="Times New Roman" panose="02020603050405020304" pitchFamily="18" charset="0"/>
+              </a:rPr>
+              <a:t> — выполнены запросы в </a:t>
             </a:r>
             <a:r>
               <a:rPr lang="ru-RU" sz="1400" b="0" dirty="0" err="1">
                 <a:latin typeface="Times New Roman" panose="02020603050405020304" pitchFamily="18" charset="0"/>
                 <a:cs typeface="Times New Roman" panose="02020603050405020304" pitchFamily="18" charset="0"/>
               </a:rPr>
-              <a:t>Kitten</a:t>
+              <a:t>Hue</a:t>
             </a:r>
             <a:r>
               <a:rPr lang="ru-RU" sz="1400" b="0" dirty="0">
                 <a:latin typeface="Times New Roman" panose="02020603050405020304" pitchFamily="18" charset="0"/>
                 <a:cs typeface="Times New Roman" panose="02020603050405020304" pitchFamily="18" charset="0"/>
               </a:rPr>
-              <a:t> / </a:t>
+              <a:t>: подсчёт общего числа котов, распределение по возрастам, топ-10 пород, статистика по кластерам.</a:t>
+            </a:r>
+          </a:p>
+          <a:p>
+            <a:r>
+              <a:rPr lang="ru-RU" sz="1400" dirty="0">
+                <a:latin typeface="Times New Roman" panose="02020603050405020304" pitchFamily="18" charset="0"/>
+                <a:cs typeface="Times New Roman" panose="02020603050405020304" pitchFamily="18" charset="0"/>
+              </a:rPr>
+              <a:t>6. Веб-приложение (</a:t>
+            </a:r>
+            <a:r>
+              <a:rPr lang="ru-RU" sz="1400" dirty="0" err="1">
+                <a:latin typeface="Times New Roman" panose="02020603050405020304" pitchFamily="18" charset="0"/>
+                <a:cs typeface="Times New Roman" panose="02020603050405020304" pitchFamily="18" charset="0"/>
+              </a:rPr>
+              <a:t>Flask</a:t>
+            </a:r>
+            <a:r>
+              <a:rPr lang="ru-RU" sz="1400" dirty="0">
+                <a:latin typeface="Times New Roman" panose="02020603050405020304" pitchFamily="18" charset="0"/>
+                <a:cs typeface="Times New Roman" panose="02020603050405020304" pitchFamily="18" charset="0"/>
+              </a:rPr>
+              <a:t> + </a:t>
+            </a:r>
+            <a:r>
+              <a:rPr lang="ru-RU" sz="1400" dirty="0" err="1">
+                <a:latin typeface="Times New Roman" panose="02020603050405020304" pitchFamily="18" charset="0"/>
+                <a:cs typeface="Times New Roman" panose="02020603050405020304" pitchFamily="18" charset="0"/>
+              </a:rPr>
+              <a:t>PySpark</a:t>
+            </a:r>
+            <a:r>
+              <a:rPr lang="ru-RU" sz="1400" dirty="0">
+                <a:latin typeface="Times New Roman" panose="02020603050405020304" pitchFamily="18" charset="0"/>
+                <a:cs typeface="Times New Roman" panose="02020603050405020304" pitchFamily="18" charset="0"/>
+              </a:rPr>
+              <a:t>)</a:t>
+            </a:r>
+            <a:r>
+              <a:rPr lang="ru-RU" sz="1400" b="0" dirty="0">
+                <a:latin typeface="Times New Roman" panose="02020603050405020304" pitchFamily="18" charset="0"/>
+                <a:cs typeface="Times New Roman" panose="02020603050405020304" pitchFamily="18" charset="0"/>
+              </a:rPr>
+              <a:t> — разработаны </a:t>
             </a:r>
             <a:r>
               <a:rPr lang="ru-RU" sz="1400" b="0" dirty="0" err="1">
                 <a:latin typeface="Times New Roman" panose="02020603050405020304" pitchFamily="18" charset="0"/>
                 <a:cs typeface="Times New Roman" panose="02020603050405020304" pitchFamily="18" charset="0"/>
               </a:rPr>
-              <a:t>Adult</a:t>
+              <a:t>эндпоинты</a:t>
             </a:r>
             <a:r>
               <a:rPr lang="ru-RU" sz="1400" b="0" dirty="0">
                 <a:latin typeface="Times New Roman" panose="02020603050405020304" pitchFamily="18" charset="0"/>
                 <a:cs typeface="Times New Roman" panose="02020603050405020304" pitchFamily="18" charset="0"/>
               </a:rPr>
-              <a:t> / </a:t>
+              <a:t>: главная страница с поиском, статистика, поиск по имени/возрасту, рекомендации по ID кота.</a:t>
+            </a:r>
+          </a:p>
+          <a:p>
+            <a:r>
+              <a:rPr lang="ru-RU" sz="1400" dirty="0">
+                <a:latin typeface="Times New Roman" panose="02020603050405020304" pitchFamily="18" charset="0"/>
+                <a:cs typeface="Times New Roman" panose="02020603050405020304" pitchFamily="18" charset="0"/>
+              </a:rPr>
+              <a:t>7. Визуализация через </a:t>
+            </a:r>
+            <a:r>
+              <a:rPr lang="ru-RU" sz="1400" dirty="0" err="1">
+                <a:latin typeface="Times New Roman" panose="02020603050405020304" pitchFamily="18" charset="0"/>
+                <a:cs typeface="Times New Roman" panose="02020603050405020304" pitchFamily="18" charset="0"/>
+              </a:rPr>
+              <a:t>Hue</a:t>
+            </a:r>
+            <a:r>
+              <a:rPr lang="ru-RU" sz="1400" b="0" dirty="0">
+                <a:latin typeface="Times New Roman" panose="02020603050405020304" pitchFamily="18" charset="0"/>
+                <a:cs typeface="Times New Roman" panose="02020603050405020304" pitchFamily="18" charset="0"/>
+              </a:rPr>
+              <a:t> — созданы </a:t>
             </a:r>
             <a:r>
               <a:rPr lang="ru-RU" sz="1400" b="0" dirty="0" err="1">
                 <a:latin typeface="Times New Roman" panose="02020603050405020304" pitchFamily="18" charset="0"/>
                 <a:cs typeface="Times New Roman" panose="02020603050405020304" pitchFamily="18" charset="0"/>
               </a:rPr>
-              <a:t>Senior</a:t>
+              <a:t>дашборды</a:t>
             </a:r>
             <a:r>
               <a:rPr lang="ru-RU" sz="1400" b="0" dirty="0">
                 <a:latin typeface="Times New Roman" panose="02020603050405020304" pitchFamily="18" charset="0"/>
                 <a:cs typeface="Times New Roman" panose="02020603050405020304" pitchFamily="18" charset="0"/>
               </a:rPr>
-              <a:t>), приведение типов.</a:t>
-            </a:r>
-          </a:p>
-          <a:p>
-            <a:r>
-              <a:rPr lang="ru-RU" sz="1400" dirty="0" smtClean="0">
-                <a:latin typeface="Times New Roman" panose="02020603050405020304" pitchFamily="18" charset="0"/>
-                <a:cs typeface="Times New Roman" panose="02020603050405020304" pitchFamily="18" charset="0"/>
-              </a:rPr>
-              <a:t>3. Кластеризация </a:t>
-            </a:r>
+              <a:t> с диаграммами, настроен </a:t>
+            </a:r>
+            <a:r>
+              <a:rPr lang="ru-RU" sz="1400" b="0" dirty="0" err="1">
+                <a:latin typeface="Times New Roman" panose="02020603050405020304" pitchFamily="18" charset="0"/>
+                <a:cs typeface="Times New Roman" panose="02020603050405020304" pitchFamily="18" charset="0"/>
+              </a:rPr>
+              <a:t>File</a:t>
+            </a:r>
+            <a:r>
+              <a:rPr lang="ru-RU" sz="1400" b="0" dirty="0">
+                <a:latin typeface="Times New Roman" panose="02020603050405020304" pitchFamily="18" charset="0"/>
+                <a:cs typeface="Times New Roman" panose="02020603050405020304" pitchFamily="18" charset="0"/>
+              </a:rPr>
+              <a:t> </a:t>
+            </a:r>
+            <a:r>
+              <a:rPr lang="ru-RU" sz="1400" b="0" dirty="0" err="1">
+                <a:latin typeface="Times New Roman" panose="02020603050405020304" pitchFamily="18" charset="0"/>
+                <a:cs typeface="Times New Roman" panose="02020603050405020304" pitchFamily="18" charset="0"/>
+              </a:rPr>
+              <a:t>Browser</a:t>
+            </a:r>
+            <a:r>
+              <a:rPr lang="ru-RU" sz="1400" b="0" dirty="0">
+                <a:latin typeface="Times New Roman" panose="02020603050405020304" pitchFamily="18" charset="0"/>
+                <a:cs typeface="Times New Roman" panose="02020603050405020304" pitchFamily="18" charset="0"/>
+              </a:rPr>
+              <a:t> и </a:t>
+            </a:r>
+            <a:r>
+              <a:rPr lang="ru-RU" sz="1400" b="0" dirty="0" err="1">
+                <a:latin typeface="Times New Roman" panose="02020603050405020304" pitchFamily="18" charset="0"/>
+                <a:cs typeface="Times New Roman" panose="02020603050405020304" pitchFamily="18" charset="0"/>
+              </a:rPr>
+              <a:t>Hive</a:t>
+            </a:r>
+            <a:r>
+              <a:rPr lang="ru-RU" sz="1400" b="0" dirty="0">
+                <a:latin typeface="Times New Roman" panose="02020603050405020304" pitchFamily="18" charset="0"/>
+                <a:cs typeface="Times New Roman" panose="02020603050405020304" pitchFamily="18" charset="0"/>
+              </a:rPr>
+              <a:t> </a:t>
+            </a:r>
+            <a:r>
+              <a:rPr lang="ru-RU" sz="1400" b="0" dirty="0" err="1">
+                <a:latin typeface="Times New Roman" panose="02020603050405020304" pitchFamily="18" charset="0"/>
+                <a:cs typeface="Times New Roman" panose="02020603050405020304" pitchFamily="18" charset="0"/>
+              </a:rPr>
+              <a:t>Editor</a:t>
+            </a:r>
+            <a:r>
+              <a:rPr lang="ru-RU" sz="1400" b="0" dirty="0">
+                <a:latin typeface="Times New Roman" panose="02020603050405020304" pitchFamily="18" charset="0"/>
+                <a:cs typeface="Times New Roman" panose="02020603050405020304" pitchFamily="18" charset="0"/>
+              </a:rPr>
+              <a:t>.</a:t>
+            </a:r>
+          </a:p>
+          <a:p>
             <a:r>
               <a:rPr lang="ru-RU" sz="1400" dirty="0">
-                <a:latin typeface="Times New Roman" panose="02020603050405020304" pitchFamily="18" charset="0"/>
-                <a:cs typeface="Times New Roman" panose="02020603050405020304" pitchFamily="18" charset="0"/>
-              </a:rPr>
-              <a:t>(</a:t>
-            </a:r>
-            <a:r>
-              <a:rPr lang="ru-RU" sz="1400" dirty="0" err="1">
-                <a:latin typeface="Times New Roman" panose="02020603050405020304" pitchFamily="18" charset="0"/>
-                <a:cs typeface="Times New Roman" panose="02020603050405020304" pitchFamily="18" charset="0"/>
-              </a:rPr>
-              <a:t>Spark</a:t>
-            </a:r>
-            <a:r>
-              <a:rPr lang="ru-RU" sz="1400" dirty="0">
-                <a:latin typeface="Times New Roman" panose="02020603050405020304" pitchFamily="18" charset="0"/>
-                <a:cs typeface="Times New Roman" panose="02020603050405020304" pitchFamily="18" charset="0"/>
-              </a:rPr>
-              <a:t> </a:t>
-            </a:r>
-            <a:r>
-              <a:rPr lang="ru-RU" sz="1400" dirty="0" err="1">
-                <a:latin typeface="Times New Roman" panose="02020603050405020304" pitchFamily="18" charset="0"/>
-                <a:cs typeface="Times New Roman" panose="02020603050405020304" pitchFamily="18" charset="0"/>
-              </a:rPr>
-              <a:t>MLlib</a:t>
-            </a:r>
-            <a:r>
-              <a:rPr lang="ru-RU" sz="1400" dirty="0">
-                <a:latin typeface="Times New Roman" panose="02020603050405020304" pitchFamily="18" charset="0"/>
-                <a:cs typeface="Times New Roman" panose="02020603050405020304" pitchFamily="18" charset="0"/>
-              </a:rPr>
-              <a:t>)</a:t>
-            </a:r>
-            <a:r>
-              <a:rPr lang="ru-RU" sz="1400" b="0" dirty="0">
-                <a:latin typeface="Times New Roman" panose="02020603050405020304" pitchFamily="18" charset="0"/>
-                <a:cs typeface="Times New Roman" panose="02020603050405020304" pitchFamily="18" charset="0"/>
-              </a:rPr>
-              <a:t> — все коты разделены на 5 кластеров алгоритмом </a:t>
-            </a:r>
-            <a:r>
-              <a:rPr lang="ru-RU" sz="1400" b="0" dirty="0" err="1">
-                <a:latin typeface="Times New Roman" panose="02020603050405020304" pitchFamily="18" charset="0"/>
-                <a:cs typeface="Times New Roman" panose="02020603050405020304" pitchFamily="18" charset="0"/>
-              </a:rPr>
-              <a:t>KMeans</a:t>
-            </a:r>
-            <a:r>
-              <a:rPr lang="ru-RU" sz="1400" b="0" dirty="0">
-                <a:latin typeface="Times New Roman" panose="02020603050405020304" pitchFamily="18" charset="0"/>
-                <a:cs typeface="Times New Roman" panose="02020603050405020304" pitchFamily="18" charset="0"/>
-              </a:rPr>
-              <a:t> по признакам (возраст, размер, шерсть, здоровье). Результат сохранён в </a:t>
-            </a:r>
-            <a:r>
-              <a:rPr lang="ru-RU" sz="1400" b="0" dirty="0" err="1">
-                <a:latin typeface="Times New Roman" panose="02020603050405020304" pitchFamily="18" charset="0"/>
-                <a:cs typeface="Times New Roman" panose="02020603050405020304" pitchFamily="18" charset="0"/>
-              </a:rPr>
-              <a:t>Hive</a:t>
-            </a:r>
-            <a:r>
-              <a:rPr lang="ru-RU" sz="1400" b="0" dirty="0">
-                <a:latin typeface="Times New Roman" panose="02020603050405020304" pitchFamily="18" charset="0"/>
-                <a:cs typeface="Times New Roman" panose="02020603050405020304" pitchFamily="18" charset="0"/>
-              </a:rPr>
-              <a:t>-таблицу </a:t>
-            </a:r>
-            <a:r>
-              <a:rPr lang="ru-RU" sz="1400" b="0" dirty="0" err="1">
-                <a:latin typeface="Times New Roman" panose="02020603050405020304" pitchFamily="18" charset="0"/>
-                <a:cs typeface="Times New Roman" panose="02020603050405020304" pitchFamily="18" charset="0"/>
-              </a:rPr>
-              <a:t>cats_clustered</a:t>
-            </a:r>
-            <a:r>
-              <a:rPr lang="ru-RU" sz="1400" b="0" dirty="0">
-                <a:latin typeface="Times New Roman" panose="02020603050405020304" pitchFamily="18" charset="0"/>
-                <a:cs typeface="Times New Roman" panose="02020603050405020304" pitchFamily="18" charset="0"/>
-              </a:rPr>
-              <a:t>.</a:t>
-            </a:r>
-          </a:p>
-          <a:p>
-            <a:r>
-              <a:rPr lang="ru-RU" sz="1400" dirty="0" smtClean="0">
-                <a:latin typeface="Times New Roman" panose="02020603050405020304" pitchFamily="18" charset="0"/>
-                <a:cs typeface="Times New Roman" panose="02020603050405020304" pitchFamily="18" charset="0"/>
-              </a:rPr>
-              <a:t>4. Рекомендательная </a:t>
-            </a:r>
-            <a:r>
-              <a:rPr lang="ru-RU" sz="1400" dirty="0">
-                <a:latin typeface="Times New Roman" panose="02020603050405020304" pitchFamily="18" charset="0"/>
-                <a:cs typeface="Times New Roman" panose="02020603050405020304" pitchFamily="18" charset="0"/>
-              </a:rPr>
-              <a:t>система (</a:t>
-            </a:r>
-            <a:r>
-              <a:rPr lang="ru-RU" sz="1400" dirty="0" err="1">
-                <a:latin typeface="Times New Roman" panose="02020603050405020304" pitchFamily="18" charset="0"/>
-                <a:cs typeface="Times New Roman" panose="02020603050405020304" pitchFamily="18" charset="0"/>
-              </a:rPr>
-              <a:t>Spark</a:t>
-            </a:r>
-            <a:r>
-              <a:rPr lang="ru-RU" sz="1400" dirty="0">
-                <a:latin typeface="Times New Roman" panose="02020603050405020304" pitchFamily="18" charset="0"/>
-                <a:cs typeface="Times New Roman" panose="02020603050405020304" pitchFamily="18" charset="0"/>
-              </a:rPr>
-              <a:t> </a:t>
-            </a:r>
-            <a:r>
-              <a:rPr lang="ru-RU" sz="1400" dirty="0" err="1">
-                <a:latin typeface="Times New Roman" panose="02020603050405020304" pitchFamily="18" charset="0"/>
-                <a:cs typeface="Times New Roman" panose="02020603050405020304" pitchFamily="18" charset="0"/>
-              </a:rPr>
-              <a:t>MLlib</a:t>
-            </a:r>
-            <a:r>
-              <a:rPr lang="ru-RU" sz="1400" dirty="0">
-                <a:latin typeface="Times New Roman" panose="02020603050405020304" pitchFamily="18" charset="0"/>
-                <a:cs typeface="Times New Roman" panose="02020603050405020304" pitchFamily="18" charset="0"/>
-              </a:rPr>
-              <a:t>)</a:t>
-            </a:r>
-            <a:r>
-              <a:rPr lang="ru-RU" sz="1400" b="0" dirty="0">
-                <a:latin typeface="Times New Roman" panose="02020603050405020304" pitchFamily="18" charset="0"/>
-                <a:cs typeface="Times New Roman" panose="02020603050405020304" pitchFamily="18" charset="0"/>
-              </a:rPr>
-              <a:t> — на основе кластеров сгенерированы синтетические взаимодействия, построена модель ALS, для каждого пользователя выдано 5 рекомендаций. Результат сохранён в </a:t>
-            </a:r>
-            <a:r>
-              <a:rPr lang="ru-RU" sz="1400" b="0" dirty="0" err="1">
-                <a:latin typeface="Times New Roman" panose="02020603050405020304" pitchFamily="18" charset="0"/>
-                <a:cs typeface="Times New Roman" panose="02020603050405020304" pitchFamily="18" charset="0"/>
-              </a:rPr>
-              <a:t>cat_recommendations</a:t>
-            </a:r>
-            <a:r>
-              <a:rPr lang="ru-RU" sz="1400" b="0" dirty="0">
-                <a:latin typeface="Times New Roman" panose="02020603050405020304" pitchFamily="18" charset="0"/>
-                <a:cs typeface="Times New Roman" panose="02020603050405020304" pitchFamily="18" charset="0"/>
-              </a:rPr>
-              <a:t>.</a:t>
-            </a:r>
-          </a:p>
-          <a:p>
-            <a:r>
-              <a:rPr lang="ru-RU" sz="1400" dirty="0" smtClean="0">
-                <a:latin typeface="Times New Roman" panose="02020603050405020304" pitchFamily="18" charset="0"/>
-                <a:cs typeface="Times New Roman" panose="02020603050405020304" pitchFamily="18" charset="0"/>
-              </a:rPr>
-              <a:t>5. Аналитический </a:t>
-            </a:r>
-            <a:r>
-              <a:rPr lang="ru-RU" sz="1400" dirty="0">
-                <a:latin typeface="Times New Roman" panose="02020603050405020304" pitchFamily="18" charset="0"/>
-                <a:cs typeface="Times New Roman" panose="02020603050405020304" pitchFamily="18" charset="0"/>
-              </a:rPr>
-              <a:t>блок (</a:t>
-            </a:r>
-            <a:r>
-              <a:rPr lang="ru-RU" sz="1400" dirty="0" err="1">
-                <a:latin typeface="Times New Roman" panose="02020603050405020304" pitchFamily="18" charset="0"/>
-                <a:cs typeface="Times New Roman" panose="02020603050405020304" pitchFamily="18" charset="0"/>
-              </a:rPr>
-              <a:t>Hive</a:t>
-            </a:r>
-            <a:r>
-              <a:rPr lang="ru-RU" sz="1400" dirty="0">
-                <a:latin typeface="Times New Roman" panose="02020603050405020304" pitchFamily="18" charset="0"/>
-                <a:cs typeface="Times New Roman" panose="02020603050405020304" pitchFamily="18" charset="0"/>
-              </a:rPr>
-              <a:t> / </a:t>
-            </a:r>
-            <a:r>
-              <a:rPr lang="ru-RU" sz="1400" dirty="0" err="1">
-                <a:latin typeface="Times New Roman" panose="02020603050405020304" pitchFamily="18" charset="0"/>
-                <a:cs typeface="Times New Roman" panose="02020603050405020304" pitchFamily="18" charset="0"/>
-              </a:rPr>
-              <a:t>Spark</a:t>
-            </a:r>
-            <a:r>
-              <a:rPr lang="ru-RU" sz="1400" dirty="0">
-                <a:latin typeface="Times New Roman" panose="02020603050405020304" pitchFamily="18" charset="0"/>
-                <a:cs typeface="Times New Roman" panose="02020603050405020304" pitchFamily="18" charset="0"/>
-              </a:rPr>
-              <a:t> SQL)</a:t>
-            </a:r>
-            <a:r>
-              <a:rPr lang="ru-RU" sz="1400" b="0" dirty="0">
-                <a:latin typeface="Times New Roman" panose="02020603050405020304" pitchFamily="18" charset="0"/>
-                <a:cs typeface="Times New Roman" panose="02020603050405020304" pitchFamily="18" charset="0"/>
-              </a:rPr>
-              <a:t> — выполнены запросы в </a:t>
-            </a:r>
-            <a:r>
-              <a:rPr lang="ru-RU" sz="1400" b="0" dirty="0" err="1">
-                <a:latin typeface="Times New Roman" panose="02020603050405020304" pitchFamily="18" charset="0"/>
-                <a:cs typeface="Times New Roman" panose="02020603050405020304" pitchFamily="18" charset="0"/>
-              </a:rPr>
-              <a:t>Hue</a:t>
-            </a:r>
-            <a:r>
-              <a:rPr lang="ru-RU" sz="1400" b="0" dirty="0">
-                <a:latin typeface="Times New Roman" panose="02020603050405020304" pitchFamily="18" charset="0"/>
-                <a:cs typeface="Times New Roman" panose="02020603050405020304" pitchFamily="18" charset="0"/>
-              </a:rPr>
-              <a:t>: подсчёт общего числа </a:t>
-            </a:r>
-            <a:r>
-              <a:rPr lang="ru-RU" sz="1400" b="0" dirty="0" smtClean="0">
-                <a:latin typeface="Times New Roman" panose="02020603050405020304" pitchFamily="18" charset="0"/>
-                <a:cs typeface="Times New Roman" panose="02020603050405020304" pitchFamily="18" charset="0"/>
-              </a:rPr>
-              <a:t>котов, распределение </a:t>
-            </a:r>
-            <a:r>
-              <a:rPr lang="ru-RU" sz="1400" b="0" dirty="0">
-                <a:latin typeface="Times New Roman" panose="02020603050405020304" pitchFamily="18" charset="0"/>
-                <a:cs typeface="Times New Roman" panose="02020603050405020304" pitchFamily="18" charset="0"/>
-              </a:rPr>
-              <a:t>по возрастам, топ-10 пород, статистика по кластерам.</a:t>
-            </a:r>
-          </a:p>
-          <a:p>
-            <a:r>
-              <a:rPr lang="ru-RU" sz="1400" dirty="0" smtClean="0">
-                <a:latin typeface="Times New Roman" panose="02020603050405020304" pitchFamily="18" charset="0"/>
-                <a:cs typeface="Times New Roman" panose="02020603050405020304" pitchFamily="18" charset="0"/>
-              </a:rPr>
-              <a:t>6. Веб-приложение </a:t>
-            </a:r>
-            <a:r>
-              <a:rPr lang="ru-RU" sz="1400" dirty="0">
-                <a:latin typeface="Times New Roman" panose="02020603050405020304" pitchFamily="18" charset="0"/>
-                <a:cs typeface="Times New Roman" panose="02020603050405020304" pitchFamily="18" charset="0"/>
-              </a:rPr>
-              <a:t>(</a:t>
-            </a:r>
-            <a:r>
-              <a:rPr lang="ru-RU" sz="1400" dirty="0" err="1">
-                <a:latin typeface="Times New Roman" panose="02020603050405020304" pitchFamily="18" charset="0"/>
-                <a:cs typeface="Times New Roman" panose="02020603050405020304" pitchFamily="18" charset="0"/>
-              </a:rPr>
-              <a:t>Flask</a:t>
-            </a:r>
-            <a:r>
-              <a:rPr lang="ru-RU" sz="1400" dirty="0">
-                <a:latin typeface="Times New Roman" panose="02020603050405020304" pitchFamily="18" charset="0"/>
-                <a:cs typeface="Times New Roman" panose="02020603050405020304" pitchFamily="18" charset="0"/>
-              </a:rPr>
-              <a:t> + </a:t>
-            </a:r>
-            <a:r>
-              <a:rPr lang="ru-RU" sz="1400" dirty="0" err="1">
-                <a:latin typeface="Times New Roman" panose="02020603050405020304" pitchFamily="18" charset="0"/>
-                <a:cs typeface="Times New Roman" panose="02020603050405020304" pitchFamily="18" charset="0"/>
-              </a:rPr>
-              <a:t>PySpark</a:t>
-            </a:r>
-            <a:r>
-              <a:rPr lang="ru-RU" sz="1400" dirty="0">
-                <a:latin typeface="Times New Roman" panose="02020603050405020304" pitchFamily="18" charset="0"/>
-                <a:cs typeface="Times New Roman" panose="02020603050405020304" pitchFamily="18" charset="0"/>
-              </a:rPr>
-              <a:t>)</a:t>
-            </a:r>
-            <a:r>
-              <a:rPr lang="ru-RU" sz="1400" b="0" dirty="0">
-                <a:latin typeface="Times New Roman" panose="02020603050405020304" pitchFamily="18" charset="0"/>
-                <a:cs typeface="Times New Roman" panose="02020603050405020304" pitchFamily="18" charset="0"/>
-              </a:rPr>
-              <a:t> — разработаны </a:t>
-            </a:r>
-            <a:r>
-              <a:rPr lang="ru-RU" sz="1400" b="0" dirty="0" err="1">
-                <a:latin typeface="Times New Roman" panose="02020603050405020304" pitchFamily="18" charset="0"/>
-                <a:cs typeface="Times New Roman" panose="02020603050405020304" pitchFamily="18" charset="0"/>
-              </a:rPr>
-              <a:t>эндпоинты</a:t>
-            </a:r>
-            <a:r>
-              <a:rPr lang="ru-RU" sz="1400" b="0" dirty="0">
-                <a:latin typeface="Times New Roman" panose="02020603050405020304" pitchFamily="18" charset="0"/>
-                <a:cs typeface="Times New Roman" panose="02020603050405020304" pitchFamily="18" charset="0"/>
-              </a:rPr>
-              <a:t>: главная страница с поиском, статистика, поиск по имени/возрасту, рекомендации по ID кота.</a:t>
-            </a:r>
-          </a:p>
-          <a:p>
-            <a:r>
-              <a:rPr lang="ru-RU" sz="1400" dirty="0" smtClean="0">
-                <a:latin typeface="Times New Roman" panose="02020603050405020304" pitchFamily="18" charset="0"/>
-                <a:cs typeface="Times New Roman" panose="02020603050405020304" pitchFamily="18" charset="0"/>
-              </a:rPr>
-              <a:t>7. Визуализация </a:t>
-            </a:r>
-            <a:r>
-              <a:rPr lang="ru-RU" sz="1400" dirty="0">
-                <a:latin typeface="Times New Roman" panose="02020603050405020304" pitchFamily="18" charset="0"/>
-                <a:cs typeface="Times New Roman" panose="02020603050405020304" pitchFamily="18" charset="0"/>
-              </a:rPr>
-              <a:t>через </a:t>
-            </a:r>
-            <a:r>
-              <a:rPr lang="ru-RU" sz="1400" dirty="0" err="1">
-                <a:latin typeface="Times New Roman" panose="02020603050405020304" pitchFamily="18" charset="0"/>
-                <a:cs typeface="Times New Roman" panose="02020603050405020304" pitchFamily="18" charset="0"/>
-              </a:rPr>
-              <a:t>Hue</a:t>
-            </a:r>
-            <a:r>
-              <a:rPr lang="ru-RU" sz="1400" b="0" dirty="0">
-                <a:latin typeface="Times New Roman" panose="02020603050405020304" pitchFamily="18" charset="0"/>
-                <a:cs typeface="Times New Roman" panose="02020603050405020304" pitchFamily="18" charset="0"/>
-              </a:rPr>
-              <a:t> — созданы </a:t>
-            </a:r>
-            <a:r>
-              <a:rPr lang="ru-RU" sz="1400" b="0" dirty="0" err="1">
-                <a:latin typeface="Times New Roman" panose="02020603050405020304" pitchFamily="18" charset="0"/>
-                <a:cs typeface="Times New Roman" panose="02020603050405020304" pitchFamily="18" charset="0"/>
-              </a:rPr>
-              <a:t>дашборды</a:t>
-            </a:r>
-            <a:r>
-              <a:rPr lang="ru-RU" sz="1400" b="0" dirty="0">
-                <a:latin typeface="Times New Roman" panose="02020603050405020304" pitchFamily="18" charset="0"/>
-                <a:cs typeface="Times New Roman" panose="02020603050405020304" pitchFamily="18" charset="0"/>
-              </a:rPr>
-              <a:t> с диаграммами, настроен </a:t>
-            </a:r>
-            <a:r>
-              <a:rPr lang="ru-RU" sz="1400" b="0" dirty="0" err="1">
-                <a:latin typeface="Times New Roman" panose="02020603050405020304" pitchFamily="18" charset="0"/>
-                <a:cs typeface="Times New Roman" panose="02020603050405020304" pitchFamily="18" charset="0"/>
-              </a:rPr>
-              <a:t>File</a:t>
-            </a:r>
-            <a:r>
-              <a:rPr lang="ru-RU" sz="1400" b="0" dirty="0">
-                <a:latin typeface="Times New Roman" panose="02020603050405020304" pitchFamily="18" charset="0"/>
-                <a:cs typeface="Times New Roman" panose="02020603050405020304" pitchFamily="18" charset="0"/>
-              </a:rPr>
-              <a:t> </a:t>
-            </a:r>
-            <a:r>
-              <a:rPr lang="ru-RU" sz="1400" b="0" dirty="0" err="1">
-                <a:latin typeface="Times New Roman" panose="02020603050405020304" pitchFamily="18" charset="0"/>
-                <a:cs typeface="Times New Roman" panose="02020603050405020304" pitchFamily="18" charset="0"/>
-              </a:rPr>
-              <a:t>Browser</a:t>
-            </a:r>
-            <a:r>
-              <a:rPr lang="ru-RU" sz="1400" b="0" dirty="0">
-                <a:latin typeface="Times New Roman" panose="02020603050405020304" pitchFamily="18" charset="0"/>
-                <a:cs typeface="Times New Roman" panose="02020603050405020304" pitchFamily="18" charset="0"/>
-              </a:rPr>
-              <a:t> и </a:t>
-            </a:r>
-            <a:r>
-              <a:rPr lang="ru-RU" sz="1400" b="0" dirty="0" err="1">
-                <a:latin typeface="Times New Roman" panose="02020603050405020304" pitchFamily="18" charset="0"/>
-                <a:cs typeface="Times New Roman" panose="02020603050405020304" pitchFamily="18" charset="0"/>
-              </a:rPr>
-              <a:t>Hive</a:t>
-            </a:r>
-            <a:r>
-              <a:rPr lang="ru-RU" sz="1400" b="0" dirty="0">
-                <a:latin typeface="Times New Roman" panose="02020603050405020304" pitchFamily="18" charset="0"/>
-                <a:cs typeface="Times New Roman" panose="02020603050405020304" pitchFamily="18" charset="0"/>
-              </a:rPr>
-              <a:t> </a:t>
-            </a:r>
-            <a:r>
-              <a:rPr lang="ru-RU" sz="1400" b="0" dirty="0" err="1">
-                <a:latin typeface="Times New Roman" panose="02020603050405020304" pitchFamily="18" charset="0"/>
-                <a:cs typeface="Times New Roman" panose="02020603050405020304" pitchFamily="18" charset="0"/>
-              </a:rPr>
-              <a:t>Editor</a:t>
-            </a:r>
-            <a:r>
-              <a:rPr lang="ru-RU" sz="1400" b="0" dirty="0">
-                <a:latin typeface="Times New Roman" panose="02020603050405020304" pitchFamily="18" charset="0"/>
-                <a:cs typeface="Times New Roman" panose="02020603050405020304" pitchFamily="18" charset="0"/>
-              </a:rPr>
-              <a:t>.</a:t>
-            </a:r>
-          </a:p>
-          <a:p>
-            <a:r>
-              <a:rPr lang="ru-RU" sz="1400" dirty="0" smtClean="0">
                 <a:latin typeface="Times New Roman" panose="02020603050405020304" pitchFamily="18" charset="0"/>
                 <a:cs typeface="Times New Roman" panose="02020603050405020304" pitchFamily="18" charset="0"/>
               </a:rPr>
@@ -8932,13 +8634,6 @@
   <p:clrMapOvr>
     <a:masterClrMapping/>
   </p:clrMapOvr>
-  <p:timing>
-    <p:tnLst>
-      <p:par>
-        <p:cTn id="1" dur="indefinite" restart="never" nodeType="tmRoot"/>
-      </p:par>
-    </p:tnLst>
-  </p:timing>
 </p:sld>
 </file>
 
@@ -8995,7 +8690,7 @@
         </p:nvSpPr>
         <p:spPr>
           <a:xfrm>
-            <a:off x="6300192" y="1131590"/>
+            <a:off x="6300192" y="1189866"/>
             <a:ext cx="2537554" cy="3953634"/>
           </a:xfrm>
         </p:spPr>
@@ -9068,14 +8763,14 @@
               <a:t> </a:t>
             </a:r>
             <a:r>
-              <a:rPr lang="ru-RU" dirty="0" err="1">
-                <a:solidFill>
-                  <a:schemeClr val="tx2"/>
-                </a:solidFill>
-                <a:latin typeface="Times New Roman" panose="02020603050405020304" pitchFamily="18" charset="0"/>
-                <a:cs typeface="Times New Roman" panose="02020603050405020304" pitchFamily="18" charset="0"/>
-              </a:rPr>
-              <a:t>Flume</a:t>
+              <a:rPr lang="en-US" dirty="0">
+                <a:solidFill>
+                  <a:schemeClr val="tx2"/>
+                </a:solidFill>
+                <a:latin typeface="Times New Roman" panose="02020603050405020304" pitchFamily="18" charset="0"/>
+                <a:cs typeface="Times New Roman" panose="02020603050405020304" pitchFamily="18" charset="0"/>
+              </a:rPr>
+              <a:t>Spark</a:t>
             </a:r>
             <a:r>
               <a:rPr lang="ru-RU" dirty="0">
@@ -9085,7 +8780,7 @@
                 <a:latin typeface="Times New Roman" panose="02020603050405020304" pitchFamily="18" charset="0"/>
                 <a:cs typeface="Times New Roman" panose="02020603050405020304" pitchFamily="18" charset="0"/>
               </a:rPr>
-              <a:t> (автоматическая потоковая загрузка в HDFS).</a:t>
+              <a:t> (автоматическая загрузка в HDFS посредством скрипта).</a:t>
             </a:r>
           </a:p>
           <a:p>
@@ -9197,20 +8892,10 @@
                 <a:latin typeface="Times New Roman" panose="02020603050405020304" pitchFamily="18" charset="0"/>
                 <a:cs typeface="Times New Roman" panose="02020603050405020304" pitchFamily="18" charset="0"/>
               </a:rPr>
-              <a:t>, ALS</a:t>
-            </a:r>
-            <a:r>
-              <a:rPr lang="de-DE" dirty="0" smtClean="0">
-                <a:solidFill>
-                  <a:schemeClr val="tx2"/>
-                </a:solidFill>
-                <a:latin typeface="Times New Roman" panose="02020603050405020304" pitchFamily="18" charset="0"/>
-                <a:cs typeface="Times New Roman" panose="02020603050405020304" pitchFamily="18" charset="0"/>
-              </a:rPr>
-              <a:t>)</a:t>
-            </a:r>
-            <a:r>
-              <a:rPr lang="ru-RU" dirty="0" smtClean="0">
+              <a:t>, ALS)</a:t>
+            </a:r>
+            <a:r>
+              <a:rPr lang="ru-RU" dirty="0">
                 <a:solidFill>
                   <a:schemeClr val="tx2"/>
                 </a:solidFill>
@@ -9222,7 +8907,7 @@
           </a:p>
           <a:p>
             <a:r>
-              <a:rPr lang="ru-RU" b="1" dirty="0" smtClean="0">
+              <a:rPr lang="ru-RU" b="1" dirty="0">
                 <a:solidFill>
                   <a:schemeClr val="tx2"/>
                 </a:solidFill>
@@ -9242,7 +8927,7 @@
               <a:t> </a:t>
             </a:r>
             <a:r>
-              <a:rPr lang="en-US" b="1" dirty="0" smtClean="0">
+              <a:rPr lang="en-US" b="1" dirty="0">
                 <a:solidFill>
                   <a:schemeClr val="tx2"/>
                 </a:solidFill>
@@ -9252,7 +8937,7 @@
               <a:t>Hive-</a:t>
             </a:r>
             <a:r>
-              <a:rPr lang="ru-RU" b="1" dirty="0" smtClean="0">
+              <a:rPr lang="ru-RU" b="1" dirty="0">
                 <a:solidFill>
                   <a:schemeClr val="tx2"/>
                 </a:solidFill>
@@ -9264,7 +8949,7 @@
           </a:p>
           <a:p>
             <a:r>
-              <a:rPr lang="ru-RU" b="1" dirty="0" err="1" smtClean="0">
+              <a:rPr lang="ru-RU" b="1" dirty="0" err="1">
                 <a:solidFill>
                   <a:schemeClr val="tx2"/>
                 </a:solidFill>
@@ -9345,20 +9030,10 @@
                 <a:latin typeface="Times New Roman" panose="02020603050405020304" pitchFamily="18" charset="0"/>
                 <a:cs typeface="Times New Roman" panose="02020603050405020304" pitchFamily="18" charset="0"/>
               </a:rPr>
-              <a:t>REST API</a:t>
-            </a:r>
-            <a:r>
-              <a:rPr lang="en-US" dirty="0" smtClean="0">
-                <a:solidFill>
-                  <a:schemeClr val="tx2"/>
-                </a:solidFill>
-                <a:latin typeface="Times New Roman" panose="02020603050405020304" pitchFamily="18" charset="0"/>
-                <a:cs typeface="Times New Roman" panose="02020603050405020304" pitchFamily="18" charset="0"/>
-              </a:rPr>
-              <a:t>)</a:t>
-            </a:r>
-            <a:r>
-              <a:rPr lang="ru-RU" dirty="0" smtClean="0">
+              <a:t>REST API)</a:t>
+            </a:r>
+            <a:r>
+              <a:rPr lang="ru-RU" dirty="0">
                 <a:solidFill>
                   <a:schemeClr val="tx2"/>
                 </a:solidFill>
@@ -9366,6 +9041,62 @@
                 <a:cs typeface="Times New Roman" panose="02020603050405020304" pitchFamily="18" charset="0"/>
               </a:rPr>
               <a:t>.</a:t>
+            </a:r>
+          </a:p>
+          <a:p>
+            <a:r>
+              <a:rPr lang="ru-RU" b="1" dirty="0">
+                <a:solidFill>
+                  <a:schemeClr val="tx2"/>
+                </a:solidFill>
+                <a:latin typeface="Times New Roman" panose="02020603050405020304" pitchFamily="18" charset="0"/>
+                <a:cs typeface="Times New Roman" panose="02020603050405020304" pitchFamily="18" charset="0"/>
+              </a:rPr>
+              <a:t>Визуализация и</a:t>
+            </a:r>
+            <a:r>
+              <a:rPr lang="en-US" b="1" dirty="0">
+                <a:solidFill>
+                  <a:schemeClr val="tx2"/>
+                </a:solidFill>
+                <a:latin typeface="Times New Roman" panose="02020603050405020304" pitchFamily="18" charset="0"/>
+                <a:cs typeface="Times New Roman" panose="02020603050405020304" pitchFamily="18" charset="0"/>
+              </a:rPr>
+              <a:t> </a:t>
+            </a:r>
+            <a:r>
+              <a:rPr lang="ru-RU" b="1" dirty="0">
+                <a:solidFill>
+                  <a:schemeClr val="tx2"/>
+                </a:solidFill>
+                <a:latin typeface="Times New Roman" panose="02020603050405020304" pitchFamily="18" charset="0"/>
+                <a:cs typeface="Times New Roman" panose="02020603050405020304" pitchFamily="18" charset="0"/>
+              </a:rPr>
+              <a:t>аналитика:</a:t>
+            </a:r>
+            <a:r>
+              <a:rPr lang="ru-RU" dirty="0">
+                <a:solidFill>
+                  <a:schemeClr val="tx2"/>
+                </a:solidFill>
+                <a:latin typeface="Times New Roman" panose="02020603050405020304" pitchFamily="18" charset="0"/>
+                <a:cs typeface="Times New Roman" panose="02020603050405020304" pitchFamily="18" charset="0"/>
+              </a:rPr>
+              <a:t> </a:t>
+            </a:r>
+            <a:r>
+              <a:rPr lang="en-US" b="1" dirty="0"/>
+              <a:t> </a:t>
+            </a:r>
+            <a:r>
+              <a:rPr lang="en-US" dirty="0">
+                <a:solidFill>
+                  <a:schemeClr val="tx2"/>
+                </a:solidFill>
+                <a:latin typeface="Times New Roman" panose="02020603050405020304" pitchFamily="18" charset="0"/>
+                <a:cs typeface="Times New Roman" panose="02020603050405020304" pitchFamily="18" charset="0"/>
+              </a:rPr>
+              <a:t>Hue</a:t>
             </a:r>
             <a:endParaRPr lang="ru-RU" dirty="0">
               <a:solidFill>
@@ -9384,20 +9115,10 @@
                 <a:latin typeface="Times New Roman" panose="02020603050405020304" pitchFamily="18" charset="0"/>
                 <a:cs typeface="Times New Roman" panose="02020603050405020304" pitchFamily="18" charset="0"/>
               </a:rPr>
-              <a:t>Визуализация </a:t>
-            </a:r>
-            <a:r>
-              <a:rPr lang="ru-RU" b="1" dirty="0" smtClean="0">
-                <a:solidFill>
-                  <a:schemeClr val="tx2"/>
-                </a:solidFill>
-                <a:latin typeface="Times New Roman" panose="02020603050405020304" pitchFamily="18" charset="0"/>
-                <a:cs typeface="Times New Roman" panose="02020603050405020304" pitchFamily="18" charset="0"/>
-              </a:rPr>
-              <a:t>и</a:t>
-            </a:r>
-            <a:r>
-              <a:rPr lang="en-US" b="1" dirty="0" smtClean="0">
+              <a:t>Автоматизация:</a:t>
+            </a:r>
+            <a:r>
+              <a:rPr lang="ru-RU" dirty="0">
                 <a:solidFill>
                   <a:schemeClr val="tx2"/>
                 </a:solidFill>
@@ -9407,24 +9128,14 @@
               <a:t> </a:t>
             </a:r>
             <a:r>
-              <a:rPr lang="ru-RU" b="1" dirty="0" smtClean="0">
-                <a:solidFill>
-                  <a:schemeClr val="tx2"/>
-                </a:solidFill>
-                <a:latin typeface="Times New Roman" panose="02020603050405020304" pitchFamily="18" charset="0"/>
-                <a:cs typeface="Times New Roman" panose="02020603050405020304" pitchFamily="18" charset="0"/>
-              </a:rPr>
-              <a:t>аналитика</a:t>
-            </a:r>
-            <a:r>
-              <a:rPr lang="ru-RU" b="1" dirty="0">
-                <a:solidFill>
-                  <a:schemeClr val="tx2"/>
-                </a:solidFill>
-                <a:latin typeface="Times New Roman" panose="02020603050405020304" pitchFamily="18" charset="0"/>
-                <a:cs typeface="Times New Roman" panose="02020603050405020304" pitchFamily="18" charset="0"/>
-              </a:rPr>
-              <a:t>:</a:t>
+              <a:rPr lang="en-US" dirty="0">
+                <a:solidFill>
+                  <a:schemeClr val="tx2"/>
+                </a:solidFill>
+                <a:latin typeface="Times New Roman" panose="02020603050405020304" pitchFamily="18" charset="0"/>
+                <a:cs typeface="Times New Roman" panose="02020603050405020304" pitchFamily="18" charset="0"/>
+              </a:rPr>
+              <a:t>Python-</a:t>
             </a:r>
             <a:r>
               <a:rPr lang="ru-RU" dirty="0">
@@ -9434,60 +9145,27 @@
                 <a:latin typeface="Times New Roman" panose="02020603050405020304" pitchFamily="18" charset="0"/>
                 <a:cs typeface="Times New Roman" panose="02020603050405020304" pitchFamily="18" charset="0"/>
               </a:rPr>
-              <a:t> </a:t>
-            </a:r>
-            <a:r>
-              <a:rPr lang="en-US" b="1" dirty="0"/>
-              <a:t> </a:t>
-            </a:r>
-            <a:r>
-              <a:rPr lang="en-US" dirty="0" smtClean="0">
-                <a:solidFill>
-                  <a:schemeClr val="tx2"/>
-                </a:solidFill>
-                <a:latin typeface="Times New Roman" panose="02020603050405020304" pitchFamily="18" charset="0"/>
-                <a:cs typeface="Times New Roman" panose="02020603050405020304" pitchFamily="18" charset="0"/>
-              </a:rPr>
-              <a:t>Hue</a:t>
-            </a:r>
-            <a:endParaRPr lang="ru-RU" dirty="0" smtClean="0">
-              <a:solidFill>
-                <a:schemeClr val="tx2"/>
-              </a:solidFill>
-              <a:latin typeface="Times New Roman" panose="02020603050405020304" pitchFamily="18" charset="0"/>
-              <a:cs typeface="Times New Roman" panose="02020603050405020304" pitchFamily="18" charset="0"/>
-            </a:endParaRPr>
-          </a:p>
-          <a:p>
-            <a:r>
-              <a:rPr lang="ru-RU" b="1" dirty="0" smtClean="0">
-                <a:solidFill>
-                  <a:schemeClr val="tx2"/>
-                </a:solidFill>
-                <a:latin typeface="Times New Roman" panose="02020603050405020304" pitchFamily="18" charset="0"/>
-                <a:cs typeface="Times New Roman" panose="02020603050405020304" pitchFamily="18" charset="0"/>
-              </a:rPr>
-              <a:t>Автоматизация:</a:t>
-            </a:r>
-            <a:r>
-              <a:rPr lang="ru-RU" dirty="0" smtClean="0">
-                <a:solidFill>
-                  <a:schemeClr val="tx2"/>
-                </a:solidFill>
-                <a:latin typeface="Times New Roman" panose="02020603050405020304" pitchFamily="18" charset="0"/>
-                <a:cs typeface="Times New Roman" panose="02020603050405020304" pitchFamily="18" charset="0"/>
-              </a:rPr>
-              <a:t> </a:t>
-            </a:r>
-            <a:r>
-              <a:rPr lang="en-US" dirty="0" smtClean="0">
-                <a:solidFill>
-                  <a:schemeClr val="tx2"/>
-                </a:solidFill>
-                <a:latin typeface="Times New Roman" panose="02020603050405020304" pitchFamily="18" charset="0"/>
-                <a:cs typeface="Times New Roman" panose="02020603050405020304" pitchFamily="18" charset="0"/>
-              </a:rPr>
-              <a:t>Python-</a:t>
+              <a:t>скрипт </a:t>
+            </a:r>
+            <a:r>
+              <a:rPr lang="en-US" b="1" dirty="0">
+                <a:solidFill>
+                  <a:schemeClr val="tx2"/>
+                </a:solidFill>
+                <a:latin typeface="Times New Roman" panose="02020603050405020304" pitchFamily="18" charset="0"/>
+                <a:cs typeface="Times New Roman" panose="02020603050405020304" pitchFamily="18" charset="0"/>
+              </a:rPr>
+              <a:t>run_all.py</a:t>
+            </a:r>
+            <a:r>
+              <a:rPr lang="en-US" dirty="0">
+                <a:solidFill>
+                  <a:schemeClr val="tx2"/>
+                </a:solidFill>
+                <a:latin typeface="Times New Roman" panose="02020603050405020304" pitchFamily="18" charset="0"/>
+                <a:cs typeface="Times New Roman" panose="02020603050405020304" pitchFamily="18" charset="0"/>
+              </a:rPr>
+              <a:t> (</a:t>
             </a:r>
             <a:r>
               <a:rPr lang="ru-RU" dirty="0">
@@ -9497,27 +9175,17 @@
                 <a:latin typeface="Times New Roman" panose="02020603050405020304" pitchFamily="18" charset="0"/>
                 <a:cs typeface="Times New Roman" panose="02020603050405020304" pitchFamily="18" charset="0"/>
               </a:rPr>
-              <a:t>скрипт </a:t>
-            </a:r>
-            <a:r>
-              <a:rPr lang="en-US" b="1" dirty="0">
-                <a:solidFill>
-                  <a:schemeClr val="tx2"/>
-                </a:solidFill>
-                <a:latin typeface="Times New Roman" panose="02020603050405020304" pitchFamily="18" charset="0"/>
-                <a:cs typeface="Times New Roman" panose="02020603050405020304" pitchFamily="18" charset="0"/>
-              </a:rPr>
-              <a:t>run_all.py</a:t>
-            </a:r>
-            <a:r>
-              <a:rPr lang="en-US" dirty="0">
-                <a:solidFill>
-                  <a:schemeClr val="tx2"/>
-                </a:solidFill>
-                <a:latin typeface="Times New Roman" panose="02020603050405020304" pitchFamily="18" charset="0"/>
-                <a:cs typeface="Times New Roman" panose="02020603050405020304" pitchFamily="18" charset="0"/>
-              </a:rPr>
-              <a:t> (</a:t>
+              <a:t>единый </a:t>
+            </a:r>
+            <a:r>
+              <a:rPr lang="ru-RU" dirty="0" err="1">
+                <a:solidFill>
+                  <a:schemeClr val="tx2"/>
+                </a:solidFill>
+                <a:latin typeface="Times New Roman" panose="02020603050405020304" pitchFamily="18" charset="0"/>
+                <a:cs typeface="Times New Roman" panose="02020603050405020304" pitchFamily="18" charset="0"/>
+              </a:rPr>
+              <a:t>пайплайн</a:t>
             </a:r>
             <a:r>
               <a:rPr lang="ru-RU" dirty="0">
@@ -9527,35 +9195,8 @@
                 <a:latin typeface="Times New Roman" panose="02020603050405020304" pitchFamily="18" charset="0"/>
                 <a:cs typeface="Times New Roman" panose="02020603050405020304" pitchFamily="18" charset="0"/>
               </a:rPr>
-              <a:t>единый </a:t>
-            </a:r>
-            <a:r>
-              <a:rPr lang="ru-RU" dirty="0" err="1">
-                <a:solidFill>
-                  <a:schemeClr val="tx2"/>
-                </a:solidFill>
-                <a:latin typeface="Times New Roman" panose="02020603050405020304" pitchFamily="18" charset="0"/>
-                <a:cs typeface="Times New Roman" panose="02020603050405020304" pitchFamily="18" charset="0"/>
-              </a:rPr>
-              <a:t>пайплайн</a:t>
-            </a:r>
-            <a:r>
-              <a:rPr lang="ru-RU" dirty="0">
-                <a:solidFill>
-                  <a:schemeClr val="tx2"/>
-                </a:solidFill>
-                <a:latin typeface="Times New Roman" panose="02020603050405020304" pitchFamily="18" charset="0"/>
-                <a:cs typeface="Times New Roman" panose="02020603050405020304" pitchFamily="18" charset="0"/>
-              </a:rPr>
               <a:t>)</a:t>
             </a:r>
-            <a:endParaRPr lang="ru-RU" dirty="0">
-              <a:solidFill>
-                <a:schemeClr val="tx2"/>
-              </a:solidFill>
-              <a:latin typeface="Times New Roman" panose="02020603050405020304" pitchFamily="18" charset="0"/>
-              <a:cs typeface="Times New Roman" panose="02020603050405020304" pitchFamily="18" charset="0"/>
-            </a:endParaRPr>
           </a:p>
         </p:txBody>
       </p:sp>
@@ -9601,16 +9242,6 @@
               </a:rPr>
             </a:br>
             <a:r>
-              <a:rPr lang="ru-RU" sz="2800" b="1" dirty="0" smtClean="0">
-                <a:solidFill>
-                  <a:schemeClr val="tx2"/>
-                </a:solidFill>
-                <a:latin typeface="Times New Roman" panose="02020603050405020304" pitchFamily="18" charset="0"/>
-                <a:cs typeface="Times New Roman" panose="02020603050405020304" pitchFamily="18" charset="0"/>
-              </a:rPr>
-              <a:t>для </a:t>
-            </a:r>
-            <a:r>
               <a:rPr lang="ru-RU" sz="2800" b="1" dirty="0">
                 <a:solidFill>
                   <a:schemeClr val="tx2"/>
@@ -9618,7 +9249,7 @@
                 <a:latin typeface="Times New Roman" panose="02020603050405020304" pitchFamily="18" charset="0"/>
                 <a:cs typeface="Times New Roman" panose="02020603050405020304" pitchFamily="18" charset="0"/>
               </a:rPr>
-              <a:t>работы</a:t>
+              <a:t>для работы</a:t>
             </a:r>
           </a:p>
           <a:p>
@@ -9663,21 +9294,20 @@
           </p:nvPr>
         </p:nvPicPr>
         <p:blipFill>
-          <a:blip r:embed="rId3" cstate="print">
+          <a:blip r:embed="rId3">
             <a:extLst>
               <a:ext uri="{28A0092B-C50C-407E-A947-70E740481C1C}">
                 <a14:useLocalDpi xmlns:a14="http://schemas.microsoft.com/office/drawing/2010/main" val="0"/>
               </a:ext>
             </a:extLst>
           </a:blip>
-          <a:stretch>
-            <a:fillRect/>
-          </a:stretch>
+          <a:srcRect/>
+          <a:stretch/>
         </p:blipFill>
         <p:spPr>
           <a:xfrm>
-            <a:off x="304800" y="815436"/>
-            <a:ext cx="5638800" cy="3526916"/>
+            <a:off x="306190" y="815436"/>
+            <a:ext cx="5636020" cy="3526915"/>
           </a:xfrm>
         </p:spPr>
       </p:pic>
@@ -9691,13 +9321,6 @@
   <p:clrMapOvr>
     <a:masterClrMapping/>
   </p:clrMapOvr>
-  <p:timing>
-    <p:tnLst>
-      <p:par>
-        <p:cTn id="1" dur="indefinite" restart="never" nodeType="tmRoot"/>
-      </p:par>
-    </p:tnLst>
-  </p:timing>
 </p:sld>
 </file>
 
@@ -9741,16 +9364,12 @@
           <a:lstStyle/>
           <a:p>
             <a:r>
-              <a:rPr lang="ru-RU" sz="2800" b="1" dirty="0" smtClean="0">
+              <a:rPr lang="ru-RU" sz="2800" b="1" dirty="0">
                 <a:latin typeface="Times New Roman" panose="02020603050405020304" pitchFamily="18" charset="0"/>
                 <a:cs typeface="Times New Roman" panose="02020603050405020304" pitchFamily="18" charset="0"/>
               </a:rPr>
               <a:t>Визуализация</a:t>
             </a:r>
-            <a:endParaRPr lang="ru-RU" sz="2800" b="1" dirty="0">
-              <a:latin typeface="Times New Roman" panose="02020603050405020304" pitchFamily="18" charset="0"/>
-              <a:cs typeface="Times New Roman" panose="02020603050405020304" pitchFamily="18" charset="0"/>
-            </a:endParaRPr>
           </a:p>
         </p:txBody>
       </p:sp>
@@ -9775,16 +9394,12 @@
           <a:lstStyle/>
           <a:p>
             <a:r>
-              <a:rPr lang="ru-RU" sz="1600" dirty="0" smtClean="0">
+              <a:rPr lang="ru-RU" sz="1600" dirty="0">
                 <a:latin typeface="Times New Roman" panose="02020603050405020304" pitchFamily="18" charset="0"/>
                 <a:cs typeface="Times New Roman" panose="02020603050405020304" pitchFamily="18" charset="0"/>
               </a:rPr>
               <a:t>Главная страница</a:t>
             </a:r>
-            <a:endParaRPr lang="ru-RU" sz="1600" dirty="0">
-              <a:latin typeface="Times New Roman" panose="02020603050405020304" pitchFamily="18" charset="0"/>
-              <a:cs typeface="Times New Roman" panose="02020603050405020304" pitchFamily="18" charset="0"/>
-            </a:endParaRPr>
           </a:p>
         </p:txBody>
       </p:sp>
@@ -9953,7 +9568,7 @@
           <a:lstStyle/>
           <a:p>
             <a:r>
-              <a:rPr lang="ru-RU" sz="1400" dirty="0" smtClean="0">
+              <a:rPr lang="ru-RU" sz="1400" dirty="0">
                 <a:solidFill>
                   <a:schemeClr val="tx2"/>
                 </a:solidFill>
@@ -9983,7 +9598,7 @@
               <a:t>с </a:t>
             </a:r>
             <a:r>
-              <a:rPr lang="ru-RU" sz="1400" dirty="0" err="1" smtClean="0">
+              <a:rPr lang="ru-RU" sz="1400" dirty="0" err="1">
                 <a:solidFill>
                   <a:schemeClr val="tx2"/>
                 </a:solidFill>
@@ -9993,7 +9608,7 @@
               <a:t>эндпоинтами</a:t>
             </a:r>
             <a:r>
-              <a:rPr lang="ru-RU" sz="1400" dirty="0" smtClean="0">
+              <a:rPr lang="ru-RU" sz="1400" dirty="0">
                 <a:solidFill>
                   <a:schemeClr val="tx2"/>
                 </a:solidFill>
@@ -10012,17 +9627,7 @@
                 <a:latin typeface="Times New Roman" panose="02020603050405020304" pitchFamily="18" charset="0"/>
                 <a:cs typeface="Times New Roman" panose="02020603050405020304" pitchFamily="18" charset="0"/>
               </a:rPr>
-              <a:t>с</a:t>
-            </a:r>
-            <a:r>
-              <a:rPr lang="ru-RU" sz="1400" dirty="0" smtClean="0">
-                <a:solidFill>
-                  <a:schemeClr val="tx2"/>
-                </a:solidFill>
-                <a:latin typeface="Times New Roman" panose="02020603050405020304" pitchFamily="18" charset="0"/>
-                <a:cs typeface="Times New Roman" panose="02020603050405020304" pitchFamily="18" charset="0"/>
-              </a:rPr>
-              <a:t>татистика и технологии, поиск с фильтрацией по имени и возрасту, результаты поиска в лице</a:t>
+              <a:t>статистика и технологии, поиск с фильтрацией по имени и возрасту, результаты поиска в лице</a:t>
             </a:r>
           </a:p>
           <a:p>
@@ -10034,20 +9639,10 @@
                 <a:latin typeface="Times New Roman" panose="02020603050405020304" pitchFamily="18" charset="0"/>
                 <a:cs typeface="Times New Roman" panose="02020603050405020304" pitchFamily="18" charset="0"/>
               </a:rPr>
-              <a:t>к</a:t>
-            </a:r>
-            <a:r>
-              <a:rPr lang="ru-RU" sz="1400" dirty="0" err="1" smtClean="0">
-                <a:solidFill>
-                  <a:schemeClr val="tx2"/>
-                </a:solidFill>
-                <a:latin typeface="Times New Roman" panose="02020603050405020304" pitchFamily="18" charset="0"/>
-                <a:cs typeface="Times New Roman" panose="02020603050405020304" pitchFamily="18" charset="0"/>
-              </a:rPr>
-              <a:t>атрочек</a:t>
-            </a:r>
-            <a:r>
-              <a:rPr lang="ru-RU" sz="1400" dirty="0" smtClean="0">
+              <a:t>катрочек</a:t>
+            </a:r>
+            <a:r>
+              <a:rPr lang="ru-RU" sz="1400" dirty="0">
                 <a:solidFill>
                   <a:schemeClr val="tx2"/>
                 </a:solidFill>
@@ -10069,13 +9664,6 @@
   <p:clrMapOvr>
     <a:masterClrMapping/>
   </p:clrMapOvr>
-  <p:timing>
-    <p:tnLst>
-      <p:par>
-        <p:cTn id="1" dur="indefinite" restart="never" nodeType="tmRoot"/>
-      </p:par>
-    </p:tnLst>
-  </p:timing>
 </p:sld>
 </file>
 
@@ -10119,16 +9707,12 @@
           <a:lstStyle/>
           <a:p>
             <a:r>
-              <a:rPr lang="ru-RU" sz="2800" b="1" dirty="0" smtClean="0">
+              <a:rPr lang="ru-RU" sz="2800" b="1" dirty="0">
                 <a:latin typeface="Times New Roman" panose="02020603050405020304" pitchFamily="18" charset="0"/>
                 <a:cs typeface="Times New Roman" panose="02020603050405020304" pitchFamily="18" charset="0"/>
               </a:rPr>
               <a:t>Визуализация</a:t>
             </a:r>
-            <a:endParaRPr lang="ru-RU" sz="2800" b="1" dirty="0">
-              <a:latin typeface="Times New Roman" panose="02020603050405020304" pitchFamily="18" charset="0"/>
-              <a:cs typeface="Times New Roman" panose="02020603050405020304" pitchFamily="18" charset="0"/>
-            </a:endParaRPr>
           </a:p>
         </p:txBody>
       </p:sp>
@@ -10293,17 +9877,7 @@
                 <a:latin typeface="Times New Roman" panose="02020603050405020304" pitchFamily="18" charset="0"/>
                 <a:cs typeface="Times New Roman" panose="02020603050405020304" pitchFamily="18" charset="0"/>
               </a:rPr>
-              <a:t> реализованы</a:t>
-            </a:r>
-            <a:r>
-              <a:rPr lang="ru-RU" sz="1400" dirty="0" smtClean="0">
-                <a:solidFill>
-                  <a:schemeClr val="tx2"/>
-                </a:solidFill>
-                <a:latin typeface="Times New Roman" panose="02020603050405020304" pitchFamily="18" charset="0"/>
-                <a:cs typeface="Times New Roman" panose="02020603050405020304" pitchFamily="18" charset="0"/>
-              </a:rPr>
-              <a:t>:</a:t>
+              <a:t> реализованы:</a:t>
             </a:r>
           </a:p>
           <a:p>
@@ -10695,13 +10269,6 @@
   <p:clrMapOvr>
     <a:masterClrMapping/>
   </p:clrMapOvr>
-  <p:timing>
-    <p:tnLst>
-      <p:par>
-        <p:cTn id="1" dur="indefinite" restart="never" nodeType="tmRoot"/>
-      </p:par>
-    </p:tnLst>
-  </p:timing>
 </p:sld>
 </file>
 
